--- a/docs/manual-uso-agentes.pptx
+++ b/docs/manual-uso-agentes.pptx
@@ -23,6 +23,8 @@
     <p:sldId id="271" r:id="rId22"/>
     <p:sldId id="272" r:id="rId23"/>
     <p:sldId id="273" r:id="rId24"/>
+    <p:sldId id="274" r:id="rId25"/>
+    <p:sldId id="275" r:id="rId26"/>
   </p:sldIdLst>
   <p:sldSz cx="12191695" cy="6858000" type="screen4x3"/>
   <p:notesSz cx="6858000" cy="9144000"/>
@@ -4450,7 +4452,7 @@
               </a:defRPr>
             </a:pPr>
             <a:r>
-              <a:t>10 / 18</a:t>
+              <a:t>10 / 20</a:t>
             </a:r>
           </a:p>
         </p:txBody>
@@ -5483,7 +5485,7 @@
               </a:defRPr>
             </a:pPr>
             <a:r>
-              <a:t>11 / 18</a:t>
+              <a:t>11 / 20</a:t>
             </a:r>
           </a:p>
         </p:txBody>
@@ -6939,7 +6941,7 @@
               </a:defRPr>
             </a:pPr>
             <a:r>
-              <a:t>12 / 18</a:t>
+              <a:t>12 / 20</a:t>
             </a:r>
           </a:p>
         </p:txBody>
@@ -8379,7 +8381,7 @@
               </a:defRPr>
             </a:pPr>
             <a:r>
-              <a:t>13 / 18</a:t>
+              <a:t>13 / 20</a:t>
             </a:r>
           </a:p>
         </p:txBody>
@@ -10779,7 +10781,7 @@
               </a:defRPr>
             </a:pPr>
             <a:r>
-              <a:t>14 / 18</a:t>
+              <a:t>14 / 20</a:t>
             </a:r>
           </a:p>
         </p:txBody>
@@ -12988,7 +12990,7 @@
               </a:defRPr>
             </a:pPr>
             <a:r>
-              <a:t>15 / 18</a:t>
+              <a:t>15 / 20</a:t>
             </a:r>
           </a:p>
         </p:txBody>
@@ -15127,7 +15129,7 @@
               </a:defRPr>
             </a:pPr>
             <a:r>
-              <a:t>16 / 18</a:t>
+              <a:t>16 / 20</a:t>
             </a:r>
           </a:p>
         </p:txBody>
@@ -16714,7 +16716,7 @@
               </a:defRPr>
             </a:pPr>
             <a:r>
-              <a:t>17 / 18</a:t>
+              <a:t>17 / 20</a:t>
             </a:r>
           </a:p>
         </p:txBody>
@@ -16728,6 +16730,2895 @@
 </file>
 
 <file path=ppt/slides/slide18.xml><?xml version="1.0" encoding="utf-8"?>
+<p:sld xmlns:a="http://schemas.openxmlformats.org/drawingml/2006/main" xmlns:p="http://schemas.openxmlformats.org/presentationml/2006/main" xmlns:r="http://schemas.openxmlformats.org/officeDocument/2006/relationships">
+  <p:cSld>
+    <p:bg>
+      <p:bgPr>
+        <a:solidFill>
+          <a:srgbClr val="FFFFFF"/>
+        </a:solidFill>
+        <a:effectLst/>
+      </p:bgPr>
+    </p:bg>
+    <p:spTree>
+      <p:nvGrpSpPr>
+        <p:cNvPr id="1" name=""/>
+        <p:cNvGrpSpPr/>
+        <p:nvPr/>
+      </p:nvGrpSpPr>
+      <p:grpSpPr/>
+      <p:sp>
+        <p:nvSpPr>
+          <p:cNvPr id="2" name="Rectangle 1"/>
+          <p:cNvSpPr/>
+          <p:nvPr/>
+        </p:nvSpPr>
+        <p:spPr>
+          <a:xfrm>
+            <a:off x="0" y="0"/>
+            <a:ext cx="76200" cy="6858000"/>
+          </a:xfrm>
+          <a:prstGeom prst="rect">
+            <a:avLst/>
+          </a:prstGeom>
+          <a:solidFill>
+            <a:srgbClr val="C5B358"/>
+          </a:solidFill>
+          <a:ln>
+            <a:noFill/>
+          </a:ln>
+        </p:spPr>
+        <p:style>
+          <a:lnRef idx="1">
+            <a:schemeClr val="accent1"/>
+          </a:lnRef>
+          <a:fillRef idx="3">
+            <a:schemeClr val="accent1"/>
+          </a:fillRef>
+          <a:effectRef idx="2">
+            <a:schemeClr val="accent1"/>
+          </a:effectRef>
+          <a:fontRef idx="minor">
+            <a:schemeClr val="lt1"/>
+          </a:fontRef>
+        </p:style>
+        <p:txBody>
+          <a:bodyPr rtlCol="0" anchor="ctr"/>
+          <a:lstStyle/>
+          <a:p>
+            <a:pPr algn="ctr"/>
+          </a:p>
+        </p:txBody>
+      </p:sp>
+      <p:sp>
+        <p:nvSpPr>
+          <p:cNvPr id="3" name="TextBox 2"/>
+          <p:cNvSpPr txBox="1"/>
+          <p:nvPr/>
+        </p:nvSpPr>
+        <p:spPr>
+          <a:xfrm>
+            <a:off x="1097280" y="548640"/>
+            <a:ext cx="7315200" cy="320040"/>
+          </a:xfrm>
+          <a:prstGeom prst="rect">
+            <a:avLst/>
+          </a:prstGeom>
+          <a:noFill/>
+        </p:spPr>
+        <p:txBody>
+          <a:bodyPr wrap="square" lIns="0" rIns="0" tIns="0" bIns="0">
+            <a:spAutoFit/>
+          </a:bodyPr>
+          <a:lstStyle/>
+          <a:p>
+            <a:pPr algn="l">
+              <a:defRPr sz="1100" b="1">
+                <a:solidFill>
+                  <a:srgbClr val="C5B358"/>
+                </a:solidFill>
+                <a:latin typeface="Plus Jakarta Sans"/>
+              </a:defRPr>
+            </a:pPr>
+            <a:r>
+              <a:t>07  ROTEIRO DE INICIO</a:t>
+            </a:r>
+          </a:p>
+        </p:txBody>
+      </p:sp>
+      <p:sp>
+        <p:nvSpPr>
+          <p:cNvPr id="4" name="TextBox 3"/>
+          <p:cNvSpPr txBox="1"/>
+          <p:nvPr/>
+        </p:nvSpPr>
+        <p:spPr>
+          <a:xfrm>
+            <a:off x="1097280" y="960120"/>
+            <a:ext cx="10058400" cy="640080"/>
+          </a:xfrm>
+          <a:prstGeom prst="rect">
+            <a:avLst/>
+          </a:prstGeom>
+          <a:noFill/>
+        </p:spPr>
+        <p:txBody>
+          <a:bodyPr wrap="square" lIns="0" rIns="0" tIns="0" bIns="0">
+            <a:spAutoFit/>
+          </a:bodyPr>
+          <a:lstStyle/>
+          <a:p>
+            <a:pPr algn="l">
+              <a:defRPr sz="2800" b="1">
+                <a:solidFill>
+                  <a:srgbClr val="1E1E1E"/>
+                </a:solidFill>
+                <a:latin typeface="Plus Jakarta Sans"/>
+              </a:defRPr>
+            </a:pPr>
+            <a:r>
+              <a:t>Seus primeiros 6 passos, em ordem</a:t>
+            </a:r>
+          </a:p>
+        </p:txBody>
+      </p:sp>
+      <p:sp>
+        <p:nvSpPr>
+          <p:cNvPr id="5" name="TextBox 4"/>
+          <p:cNvSpPr txBox="1"/>
+          <p:nvPr/>
+        </p:nvSpPr>
+        <p:spPr>
+          <a:xfrm>
+            <a:off x="1097280" y="1645920"/>
+            <a:ext cx="10058400" cy="365760"/>
+          </a:xfrm>
+          <a:prstGeom prst="rect">
+            <a:avLst/>
+          </a:prstGeom>
+          <a:noFill/>
+        </p:spPr>
+        <p:txBody>
+          <a:bodyPr wrap="square" lIns="0" rIns="0" tIns="0" bIns="0">
+            <a:spAutoFit/>
+          </a:bodyPr>
+          <a:lstStyle/>
+          <a:p>
+            <a:pPr algn="l">
+              <a:defRPr sz="1300" b="0">
+                <a:solidFill>
+                  <a:srgbClr val="666666"/>
+                </a:solidFill>
+                <a:latin typeface="Plus Jakarta Sans"/>
+              </a:defRPr>
+            </a:pPr>
+            <a:r>
+              <a:t>Cada passo desbloqueia o seguinte. Pular um deles compromete todos os demais.</a:t>
+            </a:r>
+          </a:p>
+        </p:txBody>
+      </p:sp>
+      <p:sp>
+        <p:nvSpPr>
+          <p:cNvPr id="6" name="Rounded Rectangle 5"/>
+          <p:cNvSpPr/>
+          <p:nvPr/>
+        </p:nvSpPr>
+        <p:spPr>
+          <a:xfrm>
+            <a:off x="640080" y="2194560"/>
+            <a:ext cx="3657600" cy="1920240"/>
+          </a:xfrm>
+          <a:prstGeom prst="roundRect">
+            <a:avLst/>
+          </a:prstGeom>
+          <a:solidFill>
+            <a:srgbClr val="F4F1EA"/>
+          </a:solidFill>
+          <a:ln w="12700">
+            <a:solidFill>
+              <a:srgbClr val="E0DDD5"/>
+            </a:solidFill>
+          </a:ln>
+        </p:spPr>
+        <p:style>
+          <a:lnRef idx="1">
+            <a:schemeClr val="accent1"/>
+          </a:lnRef>
+          <a:fillRef idx="3">
+            <a:schemeClr val="accent1"/>
+          </a:fillRef>
+          <a:effectRef idx="2">
+            <a:schemeClr val="accent1"/>
+          </a:effectRef>
+          <a:fontRef idx="minor">
+            <a:schemeClr val="lt1"/>
+          </a:fontRef>
+        </p:style>
+        <p:txBody>
+          <a:bodyPr rtlCol="0" anchor="ctr"/>
+          <a:lstStyle/>
+          <a:p>
+            <a:pPr algn="ctr"/>
+          </a:p>
+        </p:txBody>
+      </p:sp>
+      <p:sp>
+        <p:nvSpPr>
+          <p:cNvPr id="7" name="Rectangle 6"/>
+          <p:cNvSpPr/>
+          <p:nvPr/>
+        </p:nvSpPr>
+        <p:spPr>
+          <a:xfrm>
+            <a:off x="640080" y="2194560"/>
+            <a:ext cx="3657600" cy="38100"/>
+          </a:xfrm>
+          <a:prstGeom prst="rect">
+            <a:avLst/>
+          </a:prstGeom>
+          <a:solidFill>
+            <a:srgbClr val="C0392B"/>
+          </a:solidFill>
+          <a:ln>
+            <a:noFill/>
+          </a:ln>
+        </p:spPr>
+        <p:style>
+          <a:lnRef idx="1">
+            <a:schemeClr val="accent1"/>
+          </a:lnRef>
+          <a:fillRef idx="3">
+            <a:schemeClr val="accent1"/>
+          </a:fillRef>
+          <a:effectRef idx="2">
+            <a:schemeClr val="accent1"/>
+          </a:effectRef>
+          <a:fontRef idx="minor">
+            <a:schemeClr val="lt1"/>
+          </a:fontRef>
+        </p:style>
+        <p:txBody>
+          <a:bodyPr rtlCol="0" anchor="ctr"/>
+          <a:lstStyle/>
+          <a:p>
+            <a:pPr algn="ctr"/>
+          </a:p>
+        </p:txBody>
+      </p:sp>
+      <p:sp>
+        <p:nvSpPr>
+          <p:cNvPr id="8" name="Rounded Rectangle 7"/>
+          <p:cNvSpPr/>
+          <p:nvPr/>
+        </p:nvSpPr>
+        <p:spPr>
+          <a:xfrm>
+            <a:off x="822960" y="2359152"/>
+            <a:ext cx="457200" cy="384048"/>
+          </a:xfrm>
+          <a:prstGeom prst="roundRect">
+            <a:avLst/>
+          </a:prstGeom>
+          <a:solidFill>
+            <a:srgbClr val="C0392B"/>
+          </a:solidFill>
+          <a:ln>
+            <a:noFill/>
+          </a:ln>
+        </p:spPr>
+        <p:style>
+          <a:lnRef idx="1">
+            <a:schemeClr val="accent1"/>
+          </a:lnRef>
+          <a:fillRef idx="3">
+            <a:schemeClr val="accent1"/>
+          </a:fillRef>
+          <a:effectRef idx="2">
+            <a:schemeClr val="accent1"/>
+          </a:effectRef>
+          <a:fontRef idx="minor">
+            <a:schemeClr val="lt1"/>
+          </a:fontRef>
+        </p:style>
+        <p:txBody>
+          <a:bodyPr rtlCol="0" anchor="ctr"/>
+          <a:lstStyle/>
+          <a:p>
+            <a:pPr algn="ctr"/>
+          </a:p>
+        </p:txBody>
+      </p:sp>
+      <p:sp>
+        <p:nvSpPr>
+          <p:cNvPr id="9" name="TextBox 8"/>
+          <p:cNvSpPr txBox="1"/>
+          <p:nvPr/>
+        </p:nvSpPr>
+        <p:spPr>
+          <a:xfrm>
+            <a:off x="822960" y="2414016"/>
+            <a:ext cx="457200" cy="274320"/>
+          </a:xfrm>
+          <a:prstGeom prst="rect">
+            <a:avLst/>
+          </a:prstGeom>
+          <a:noFill/>
+        </p:spPr>
+        <p:txBody>
+          <a:bodyPr wrap="square" lIns="0" rIns="0" tIns="0" bIns="0">
+            <a:spAutoFit/>
+          </a:bodyPr>
+          <a:lstStyle/>
+          <a:p>
+            <a:pPr algn="ctr">
+              <a:defRPr sz="1200" b="1">
+                <a:solidFill>
+                  <a:srgbClr val="FFFFFF"/>
+                </a:solidFill>
+                <a:latin typeface="IBM Plex Mono"/>
+              </a:defRPr>
+            </a:pPr>
+            <a:r>
+              <a:t>01</a:t>
+            </a:r>
+          </a:p>
+        </p:txBody>
+      </p:sp>
+      <p:sp>
+        <p:nvSpPr>
+          <p:cNvPr id="10" name="Rounded Rectangle 9"/>
+          <p:cNvSpPr/>
+          <p:nvPr/>
+        </p:nvSpPr>
+        <p:spPr>
+          <a:xfrm>
+            <a:off x="1417320" y="2395728"/>
+            <a:ext cx="868680" cy="292608"/>
+          </a:xfrm>
+          <a:prstGeom prst="roundRect">
+            <a:avLst/>
+          </a:prstGeom>
+          <a:solidFill>
+            <a:srgbClr val="0B2823"/>
+          </a:solidFill>
+          <a:ln>
+            <a:noFill/>
+          </a:ln>
+        </p:spPr>
+        <p:style>
+          <a:lnRef idx="1">
+            <a:schemeClr val="accent1"/>
+          </a:lnRef>
+          <a:fillRef idx="3">
+            <a:schemeClr val="accent1"/>
+          </a:fillRef>
+          <a:effectRef idx="2">
+            <a:schemeClr val="accent1"/>
+          </a:effectRef>
+          <a:fontRef idx="minor">
+            <a:schemeClr val="lt1"/>
+          </a:fontRef>
+        </p:style>
+        <p:txBody>
+          <a:bodyPr rtlCol="0" anchor="ctr"/>
+          <a:lstStyle/>
+          <a:p>
+            <a:pPr algn="ctr"/>
+          </a:p>
+        </p:txBody>
+      </p:sp>
+      <p:sp>
+        <p:nvSpPr>
+          <p:cNvPr id="11" name="TextBox 10"/>
+          <p:cNvSpPr txBox="1"/>
+          <p:nvPr/>
+        </p:nvSpPr>
+        <p:spPr>
+          <a:xfrm>
+            <a:off x="1417320" y="2441448"/>
+            <a:ext cx="868680" cy="228600"/>
+          </a:xfrm>
+          <a:prstGeom prst="rect">
+            <a:avLst/>
+          </a:prstGeom>
+          <a:noFill/>
+        </p:spPr>
+        <p:txBody>
+          <a:bodyPr wrap="square" lIns="0" rIns="0" tIns="0" bIns="0">
+            <a:spAutoFit/>
+          </a:bodyPr>
+          <a:lstStyle/>
+          <a:p>
+            <a:pPr algn="ctr">
+              <a:defRPr sz="900" b="1">
+                <a:solidFill>
+                  <a:srgbClr val="D4C878"/>
+                </a:solidFill>
+                <a:latin typeface="IBM Plex Mono"/>
+              </a:defRPr>
+            </a:pPr>
+            <a:r>
+              <a:t>5 min</a:t>
+            </a:r>
+          </a:p>
+        </p:txBody>
+      </p:sp>
+      <p:sp>
+        <p:nvSpPr>
+          <p:cNvPr id="12" name="TextBox 11"/>
+          <p:cNvSpPr txBox="1"/>
+          <p:nvPr/>
+        </p:nvSpPr>
+        <p:spPr>
+          <a:xfrm>
+            <a:off x="822960" y="2834640"/>
+            <a:ext cx="3383280" cy="320040"/>
+          </a:xfrm>
+          <a:prstGeom prst="rect">
+            <a:avLst/>
+          </a:prstGeom>
+          <a:noFill/>
+        </p:spPr>
+        <p:txBody>
+          <a:bodyPr wrap="square" lIns="0" rIns="0" tIns="0" bIns="0">
+            <a:spAutoFit/>
+          </a:bodyPr>
+          <a:lstStyle/>
+          <a:p>
+            <a:pPr algn="l">
+              <a:defRPr sz="1400" b="1">
+                <a:solidFill>
+                  <a:srgbClr val="1E1E1E"/>
+                </a:solidFill>
+                <a:latin typeface="Plus Jakarta Sans"/>
+              </a:defRPr>
+            </a:pPr>
+            <a:r>
+              <a:t>Validar instalacao</a:t>
+            </a:r>
+          </a:p>
+        </p:txBody>
+      </p:sp>
+      <p:sp>
+        <p:nvSpPr>
+          <p:cNvPr id="13" name="TextBox 12"/>
+          <p:cNvSpPr txBox="1"/>
+          <p:nvPr/>
+        </p:nvSpPr>
+        <p:spPr>
+          <a:xfrm>
+            <a:off x="822960" y="3154680"/>
+            <a:ext cx="3383280" cy="548640"/>
+          </a:xfrm>
+          <a:prstGeom prst="rect">
+            <a:avLst/>
+          </a:prstGeom>
+          <a:noFill/>
+        </p:spPr>
+        <p:txBody>
+          <a:bodyPr wrap="square" lIns="0" rIns="0" tIns="0" bIns="0">
+            <a:spAutoFit/>
+          </a:bodyPr>
+          <a:lstStyle/>
+          <a:p>
+            <a:pPr algn="l">
+              <a:lnSpc>
+                <a:spcPts val="1400"/>
+              </a:lnSpc>
+              <a:defRPr sz="1000" b="0">
+                <a:solidFill>
+                  <a:srgbClr val="4A4A4A"/>
+                </a:solidFill>
+                <a:latin typeface="Plus Jakarta Sans"/>
+              </a:defRPr>
+            </a:pPr>
+            <a:r>
+              <a:t>Rode .\install.ps1 (Windows) ou ./install.sh (Mac/Linux).</a:t>
+            </a:r>
+            <a:br/>
+            <a:r>
+              <a:t>Abra Claude Code e digite /agents.</a:t>
+            </a:r>
+          </a:p>
+        </p:txBody>
+      </p:sp>
+      <p:sp>
+        <p:nvSpPr>
+          <p:cNvPr id="14" name="Rectangle 13"/>
+          <p:cNvSpPr/>
+          <p:nvPr/>
+        </p:nvSpPr>
+        <p:spPr>
+          <a:xfrm>
+            <a:off x="822960" y="3749040"/>
+            <a:ext cx="365760" cy="19050"/>
+          </a:xfrm>
+          <a:prstGeom prst="rect">
+            <a:avLst/>
+          </a:prstGeom>
+          <a:solidFill>
+            <a:srgbClr val="C0392B"/>
+          </a:solidFill>
+          <a:ln>
+            <a:noFill/>
+          </a:ln>
+        </p:spPr>
+        <p:style>
+          <a:lnRef idx="1">
+            <a:schemeClr val="accent1"/>
+          </a:lnRef>
+          <a:fillRef idx="3">
+            <a:schemeClr val="accent1"/>
+          </a:fillRef>
+          <a:effectRef idx="2">
+            <a:schemeClr val="accent1"/>
+          </a:effectRef>
+          <a:fontRef idx="minor">
+            <a:schemeClr val="lt1"/>
+          </a:fontRef>
+        </p:style>
+        <p:txBody>
+          <a:bodyPr rtlCol="0" anchor="ctr"/>
+          <a:lstStyle/>
+          <a:p>
+            <a:pPr algn="ctr"/>
+          </a:p>
+        </p:txBody>
+      </p:sp>
+      <p:sp>
+        <p:nvSpPr>
+          <p:cNvPr id="15" name="TextBox 14"/>
+          <p:cNvSpPr txBox="1"/>
+          <p:nvPr/>
+        </p:nvSpPr>
+        <p:spPr>
+          <a:xfrm>
+            <a:off x="822960" y="3794760"/>
+            <a:ext cx="3383280" cy="274320"/>
+          </a:xfrm>
+          <a:prstGeom prst="rect">
+            <a:avLst/>
+          </a:prstGeom>
+          <a:noFill/>
+        </p:spPr>
+        <p:txBody>
+          <a:bodyPr wrap="square" lIns="0" rIns="0" tIns="0" bIns="0">
+            <a:spAutoFit/>
+          </a:bodyPr>
+          <a:lstStyle/>
+          <a:p>
+            <a:pPr algn="l">
+              <a:defRPr sz="800" b="1">
+                <a:solidFill>
+                  <a:srgbClr val="C0392B"/>
+                </a:solidFill>
+                <a:latin typeface="Plus Jakarta Sans"/>
+              </a:defRPr>
+            </a:pPr>
+            <a:r>
+              <a:t>PRONTO QUANDO</a:t>
+            </a:r>
+          </a:p>
+        </p:txBody>
+      </p:sp>
+      <p:sp>
+        <p:nvSpPr>
+          <p:cNvPr id="16" name="TextBox 15"/>
+          <p:cNvSpPr txBox="1"/>
+          <p:nvPr/>
+        </p:nvSpPr>
+        <p:spPr>
+          <a:xfrm>
+            <a:off x="822960" y="3977640"/>
+            <a:ext cx="3383280" cy="274320"/>
+          </a:xfrm>
+          <a:prstGeom prst="rect">
+            <a:avLst/>
+          </a:prstGeom>
+          <a:noFill/>
+        </p:spPr>
+        <p:txBody>
+          <a:bodyPr wrap="square" lIns="0" rIns="0" tIns="0" bIns="0">
+            <a:spAutoFit/>
+          </a:bodyPr>
+          <a:lstStyle/>
+          <a:p>
+            <a:pPr algn="l">
+              <a:defRPr sz="900" b="0">
+                <a:solidFill>
+                  <a:srgbClr val="4A4A4A"/>
+                </a:solidFill>
+                <a:latin typeface="IBM Plex Mono"/>
+              </a:defRPr>
+            </a:pPr>
+            <a:r>
+              <a:t>9 agentes aparecem em /agents</a:t>
+            </a:r>
+          </a:p>
+        </p:txBody>
+      </p:sp>
+      <p:sp>
+        <p:nvSpPr>
+          <p:cNvPr id="17" name="Rounded Rectangle 16"/>
+          <p:cNvSpPr/>
+          <p:nvPr/>
+        </p:nvSpPr>
+        <p:spPr>
+          <a:xfrm>
+            <a:off x="4480560" y="2194560"/>
+            <a:ext cx="3657600" cy="1920240"/>
+          </a:xfrm>
+          <a:prstGeom prst="roundRect">
+            <a:avLst/>
+          </a:prstGeom>
+          <a:solidFill>
+            <a:srgbClr val="F4F1EA"/>
+          </a:solidFill>
+          <a:ln w="12700">
+            <a:solidFill>
+              <a:srgbClr val="E0DDD5"/>
+            </a:solidFill>
+          </a:ln>
+        </p:spPr>
+        <p:style>
+          <a:lnRef idx="1">
+            <a:schemeClr val="accent1"/>
+          </a:lnRef>
+          <a:fillRef idx="3">
+            <a:schemeClr val="accent1"/>
+          </a:fillRef>
+          <a:effectRef idx="2">
+            <a:schemeClr val="accent1"/>
+          </a:effectRef>
+          <a:fontRef idx="minor">
+            <a:schemeClr val="lt1"/>
+          </a:fontRef>
+        </p:style>
+        <p:txBody>
+          <a:bodyPr rtlCol="0" anchor="ctr"/>
+          <a:lstStyle/>
+          <a:p>
+            <a:pPr algn="ctr"/>
+          </a:p>
+        </p:txBody>
+      </p:sp>
+      <p:sp>
+        <p:nvSpPr>
+          <p:cNvPr id="18" name="Rectangle 17"/>
+          <p:cNvSpPr/>
+          <p:nvPr/>
+        </p:nvSpPr>
+        <p:spPr>
+          <a:xfrm>
+            <a:off x="4480560" y="2194560"/>
+            <a:ext cx="3657600" cy="38100"/>
+          </a:xfrm>
+          <a:prstGeom prst="rect">
+            <a:avLst/>
+          </a:prstGeom>
+          <a:solidFill>
+            <a:srgbClr val="C5B358"/>
+          </a:solidFill>
+          <a:ln>
+            <a:noFill/>
+          </a:ln>
+        </p:spPr>
+        <p:style>
+          <a:lnRef idx="1">
+            <a:schemeClr val="accent1"/>
+          </a:lnRef>
+          <a:fillRef idx="3">
+            <a:schemeClr val="accent1"/>
+          </a:fillRef>
+          <a:effectRef idx="2">
+            <a:schemeClr val="accent1"/>
+          </a:effectRef>
+          <a:fontRef idx="minor">
+            <a:schemeClr val="lt1"/>
+          </a:fontRef>
+        </p:style>
+        <p:txBody>
+          <a:bodyPr rtlCol="0" anchor="ctr"/>
+          <a:lstStyle/>
+          <a:p>
+            <a:pPr algn="ctr"/>
+          </a:p>
+        </p:txBody>
+      </p:sp>
+      <p:sp>
+        <p:nvSpPr>
+          <p:cNvPr id="19" name="Rounded Rectangle 18"/>
+          <p:cNvSpPr/>
+          <p:nvPr/>
+        </p:nvSpPr>
+        <p:spPr>
+          <a:xfrm>
+            <a:off x="4663440" y="2359152"/>
+            <a:ext cx="457200" cy="384048"/>
+          </a:xfrm>
+          <a:prstGeom prst="roundRect">
+            <a:avLst/>
+          </a:prstGeom>
+          <a:solidFill>
+            <a:srgbClr val="C5B358"/>
+          </a:solidFill>
+          <a:ln>
+            <a:noFill/>
+          </a:ln>
+        </p:spPr>
+        <p:style>
+          <a:lnRef idx="1">
+            <a:schemeClr val="accent1"/>
+          </a:lnRef>
+          <a:fillRef idx="3">
+            <a:schemeClr val="accent1"/>
+          </a:fillRef>
+          <a:effectRef idx="2">
+            <a:schemeClr val="accent1"/>
+          </a:effectRef>
+          <a:fontRef idx="minor">
+            <a:schemeClr val="lt1"/>
+          </a:fontRef>
+        </p:style>
+        <p:txBody>
+          <a:bodyPr rtlCol="0" anchor="ctr"/>
+          <a:lstStyle/>
+          <a:p>
+            <a:pPr algn="ctr"/>
+          </a:p>
+        </p:txBody>
+      </p:sp>
+      <p:sp>
+        <p:nvSpPr>
+          <p:cNvPr id="20" name="TextBox 19"/>
+          <p:cNvSpPr txBox="1"/>
+          <p:nvPr/>
+        </p:nvSpPr>
+        <p:spPr>
+          <a:xfrm>
+            <a:off x="4663440" y="2414016"/>
+            <a:ext cx="457200" cy="274320"/>
+          </a:xfrm>
+          <a:prstGeom prst="rect">
+            <a:avLst/>
+          </a:prstGeom>
+          <a:noFill/>
+        </p:spPr>
+        <p:txBody>
+          <a:bodyPr wrap="square" lIns="0" rIns="0" tIns="0" bIns="0">
+            <a:spAutoFit/>
+          </a:bodyPr>
+          <a:lstStyle/>
+          <a:p>
+            <a:pPr algn="ctr">
+              <a:defRPr sz="1200" b="1">
+                <a:solidFill>
+                  <a:srgbClr val="FFFFFF"/>
+                </a:solidFill>
+                <a:latin typeface="IBM Plex Mono"/>
+              </a:defRPr>
+            </a:pPr>
+            <a:r>
+              <a:t>02</a:t>
+            </a:r>
+          </a:p>
+        </p:txBody>
+      </p:sp>
+      <p:sp>
+        <p:nvSpPr>
+          <p:cNvPr id="21" name="Rounded Rectangle 20"/>
+          <p:cNvSpPr/>
+          <p:nvPr/>
+        </p:nvSpPr>
+        <p:spPr>
+          <a:xfrm>
+            <a:off x="5257800" y="2395728"/>
+            <a:ext cx="868680" cy="292608"/>
+          </a:xfrm>
+          <a:prstGeom prst="roundRect">
+            <a:avLst/>
+          </a:prstGeom>
+          <a:solidFill>
+            <a:srgbClr val="0B2823"/>
+          </a:solidFill>
+          <a:ln>
+            <a:noFill/>
+          </a:ln>
+        </p:spPr>
+        <p:style>
+          <a:lnRef idx="1">
+            <a:schemeClr val="accent1"/>
+          </a:lnRef>
+          <a:fillRef idx="3">
+            <a:schemeClr val="accent1"/>
+          </a:fillRef>
+          <a:effectRef idx="2">
+            <a:schemeClr val="accent1"/>
+          </a:effectRef>
+          <a:fontRef idx="minor">
+            <a:schemeClr val="lt1"/>
+          </a:fontRef>
+        </p:style>
+        <p:txBody>
+          <a:bodyPr rtlCol="0" anchor="ctr"/>
+          <a:lstStyle/>
+          <a:p>
+            <a:pPr algn="ctr"/>
+          </a:p>
+        </p:txBody>
+      </p:sp>
+      <p:sp>
+        <p:nvSpPr>
+          <p:cNvPr id="22" name="TextBox 21"/>
+          <p:cNvSpPr txBox="1"/>
+          <p:nvPr/>
+        </p:nvSpPr>
+        <p:spPr>
+          <a:xfrm>
+            <a:off x="5257800" y="2441448"/>
+            <a:ext cx="868680" cy="228600"/>
+          </a:xfrm>
+          <a:prstGeom prst="rect">
+            <a:avLst/>
+          </a:prstGeom>
+          <a:noFill/>
+        </p:spPr>
+        <p:txBody>
+          <a:bodyPr wrap="square" lIns="0" rIns="0" tIns="0" bIns="0">
+            <a:spAutoFit/>
+          </a:bodyPr>
+          <a:lstStyle/>
+          <a:p>
+            <a:pPr algn="ctr">
+              <a:defRPr sz="900" b="1">
+                <a:solidFill>
+                  <a:srgbClr val="D4C878"/>
+                </a:solidFill>
+                <a:latin typeface="IBM Plex Mono"/>
+              </a:defRPr>
+            </a:pPr>
+            <a:r>
+              <a:t>30 min</a:t>
+            </a:r>
+          </a:p>
+        </p:txBody>
+      </p:sp>
+      <p:sp>
+        <p:nvSpPr>
+          <p:cNvPr id="23" name="TextBox 22"/>
+          <p:cNvSpPr txBox="1"/>
+          <p:nvPr/>
+        </p:nvSpPr>
+        <p:spPr>
+          <a:xfrm>
+            <a:off x="4663440" y="2834640"/>
+            <a:ext cx="3383280" cy="320040"/>
+          </a:xfrm>
+          <a:prstGeom prst="rect">
+            <a:avLst/>
+          </a:prstGeom>
+          <a:noFill/>
+        </p:spPr>
+        <p:txBody>
+          <a:bodyPr wrap="square" lIns="0" rIns="0" tIns="0" bIns="0">
+            <a:spAutoFit/>
+          </a:bodyPr>
+          <a:lstStyle/>
+          <a:p>
+            <a:pPr algn="l">
+              <a:defRPr sz="1400" b="1">
+                <a:solidFill>
+                  <a:srgbClr val="1E1E1E"/>
+                </a:solidFill>
+                <a:latin typeface="Plus Jakarta Sans"/>
+              </a:defRPr>
+            </a:pPr>
+            <a:r>
+              <a:t>Calibrar voz</a:t>
+            </a:r>
+          </a:p>
+        </p:txBody>
+      </p:sp>
+      <p:sp>
+        <p:nvSpPr>
+          <p:cNvPr id="24" name="TextBox 23"/>
+          <p:cNvSpPr txBox="1"/>
+          <p:nvPr/>
+        </p:nvSpPr>
+        <p:spPr>
+          <a:xfrm>
+            <a:off x="4663440" y="3154680"/>
+            <a:ext cx="3383280" cy="548640"/>
+          </a:xfrm>
+          <a:prstGeom prst="rect">
+            <a:avLst/>
+          </a:prstGeom>
+          <a:noFill/>
+        </p:spPr>
+        <p:txBody>
+          <a:bodyPr wrap="square" lIns="0" rIns="0" tIns="0" bIns="0">
+            <a:spAutoFit/>
+          </a:bodyPr>
+          <a:lstStyle/>
+          <a:p>
+            <a:pPr algn="l">
+              <a:lnSpc>
+                <a:spcPts val="1400"/>
+              </a:lnSpc>
+              <a:defRPr sz="1000" b="0">
+                <a:solidFill>
+                  <a:srgbClr val="4A4A4A"/>
+                </a:solidFill>
+                <a:latin typeface="Plus Jakarta Sans"/>
+              </a:defRPr>
+            </a:pPr>
+            <a:r>
+              <a:t>Aplicar questionario do voice-humanizer.</a:t>
+            </a:r>
+            <a:br/>
+            <a:r>
+              <a:t>Ter 3 textos antigos seus + 1 mal-avaliado.</a:t>
+            </a:r>
+          </a:p>
+        </p:txBody>
+      </p:sp>
+      <p:sp>
+        <p:nvSpPr>
+          <p:cNvPr id="25" name="Rectangle 24"/>
+          <p:cNvSpPr/>
+          <p:nvPr/>
+        </p:nvSpPr>
+        <p:spPr>
+          <a:xfrm>
+            <a:off x="4663440" y="3749040"/>
+            <a:ext cx="365760" cy="19050"/>
+          </a:xfrm>
+          <a:prstGeom prst="rect">
+            <a:avLst/>
+          </a:prstGeom>
+          <a:solidFill>
+            <a:srgbClr val="C5B358"/>
+          </a:solidFill>
+          <a:ln>
+            <a:noFill/>
+          </a:ln>
+        </p:spPr>
+        <p:style>
+          <a:lnRef idx="1">
+            <a:schemeClr val="accent1"/>
+          </a:lnRef>
+          <a:fillRef idx="3">
+            <a:schemeClr val="accent1"/>
+          </a:fillRef>
+          <a:effectRef idx="2">
+            <a:schemeClr val="accent1"/>
+          </a:effectRef>
+          <a:fontRef idx="minor">
+            <a:schemeClr val="lt1"/>
+          </a:fontRef>
+        </p:style>
+        <p:txBody>
+          <a:bodyPr rtlCol="0" anchor="ctr"/>
+          <a:lstStyle/>
+          <a:p>
+            <a:pPr algn="ctr"/>
+          </a:p>
+        </p:txBody>
+      </p:sp>
+      <p:sp>
+        <p:nvSpPr>
+          <p:cNvPr id="26" name="TextBox 25"/>
+          <p:cNvSpPr txBox="1"/>
+          <p:nvPr/>
+        </p:nvSpPr>
+        <p:spPr>
+          <a:xfrm>
+            <a:off x="4663440" y="3794760"/>
+            <a:ext cx="3383280" cy="274320"/>
+          </a:xfrm>
+          <a:prstGeom prst="rect">
+            <a:avLst/>
+          </a:prstGeom>
+          <a:noFill/>
+        </p:spPr>
+        <p:txBody>
+          <a:bodyPr wrap="square" lIns="0" rIns="0" tIns="0" bIns="0">
+            <a:spAutoFit/>
+          </a:bodyPr>
+          <a:lstStyle/>
+          <a:p>
+            <a:pPr algn="l">
+              <a:defRPr sz="800" b="1">
+                <a:solidFill>
+                  <a:srgbClr val="C5B358"/>
+                </a:solidFill>
+                <a:latin typeface="Plus Jakarta Sans"/>
+              </a:defRPr>
+            </a:pPr>
+            <a:r>
+              <a:t>PRONTO QUANDO</a:t>
+            </a:r>
+          </a:p>
+        </p:txBody>
+      </p:sp>
+      <p:sp>
+        <p:nvSpPr>
+          <p:cNvPr id="27" name="TextBox 26"/>
+          <p:cNvSpPr txBox="1"/>
+          <p:nvPr/>
+        </p:nvSpPr>
+        <p:spPr>
+          <a:xfrm>
+            <a:off x="4663440" y="3977640"/>
+            <a:ext cx="3383280" cy="274320"/>
+          </a:xfrm>
+          <a:prstGeom prst="rect">
+            <a:avLst/>
+          </a:prstGeom>
+          <a:noFill/>
+        </p:spPr>
+        <p:txBody>
+          <a:bodyPr wrap="square" lIns="0" rIns="0" tIns="0" bIns="0">
+            <a:spAutoFit/>
+          </a:bodyPr>
+          <a:lstStyle/>
+          <a:p>
+            <a:pPr algn="l">
+              <a:defRPr sz="900" b="0">
+                <a:solidFill>
+                  <a:srgbClr val="4A4A4A"/>
+                </a:solidFill>
+                <a:latin typeface="IBM Plex Mono"/>
+              </a:defRPr>
+            </a:pPr>
+            <a:r>
+              <a:t>memory/user_writing_voice.md preenchido</a:t>
+            </a:r>
+          </a:p>
+        </p:txBody>
+      </p:sp>
+      <p:sp>
+        <p:nvSpPr>
+          <p:cNvPr id="28" name="Rounded Rectangle 27"/>
+          <p:cNvSpPr/>
+          <p:nvPr/>
+        </p:nvSpPr>
+        <p:spPr>
+          <a:xfrm>
+            <a:off x="8321040" y="2194560"/>
+            <a:ext cx="3657600" cy="1920240"/>
+          </a:xfrm>
+          <a:prstGeom prst="roundRect">
+            <a:avLst/>
+          </a:prstGeom>
+          <a:solidFill>
+            <a:srgbClr val="F4F1EA"/>
+          </a:solidFill>
+          <a:ln w="12700">
+            <a:solidFill>
+              <a:srgbClr val="E0DDD5"/>
+            </a:solidFill>
+          </a:ln>
+        </p:spPr>
+        <p:style>
+          <a:lnRef idx="1">
+            <a:schemeClr val="accent1"/>
+          </a:lnRef>
+          <a:fillRef idx="3">
+            <a:schemeClr val="accent1"/>
+          </a:fillRef>
+          <a:effectRef idx="2">
+            <a:schemeClr val="accent1"/>
+          </a:effectRef>
+          <a:fontRef idx="minor">
+            <a:schemeClr val="lt1"/>
+          </a:fontRef>
+        </p:style>
+        <p:txBody>
+          <a:bodyPr rtlCol="0" anchor="ctr"/>
+          <a:lstStyle/>
+          <a:p>
+            <a:pPr algn="ctr"/>
+          </a:p>
+        </p:txBody>
+      </p:sp>
+      <p:sp>
+        <p:nvSpPr>
+          <p:cNvPr id="29" name="Rectangle 28"/>
+          <p:cNvSpPr/>
+          <p:nvPr/>
+        </p:nvSpPr>
+        <p:spPr>
+          <a:xfrm>
+            <a:off x="8321040" y="2194560"/>
+            <a:ext cx="3657600" cy="38100"/>
+          </a:xfrm>
+          <a:prstGeom prst="rect">
+            <a:avLst/>
+          </a:prstGeom>
+          <a:solidFill>
+            <a:srgbClr val="3A564E"/>
+          </a:solidFill>
+          <a:ln>
+            <a:noFill/>
+          </a:ln>
+        </p:spPr>
+        <p:style>
+          <a:lnRef idx="1">
+            <a:schemeClr val="accent1"/>
+          </a:lnRef>
+          <a:fillRef idx="3">
+            <a:schemeClr val="accent1"/>
+          </a:fillRef>
+          <a:effectRef idx="2">
+            <a:schemeClr val="accent1"/>
+          </a:effectRef>
+          <a:fontRef idx="minor">
+            <a:schemeClr val="lt1"/>
+          </a:fontRef>
+        </p:style>
+        <p:txBody>
+          <a:bodyPr rtlCol="0" anchor="ctr"/>
+          <a:lstStyle/>
+          <a:p>
+            <a:pPr algn="ctr"/>
+          </a:p>
+        </p:txBody>
+      </p:sp>
+      <p:sp>
+        <p:nvSpPr>
+          <p:cNvPr id="30" name="Rounded Rectangle 29"/>
+          <p:cNvSpPr/>
+          <p:nvPr/>
+        </p:nvSpPr>
+        <p:spPr>
+          <a:xfrm>
+            <a:off x="8503920" y="2359152"/>
+            <a:ext cx="457200" cy="384048"/>
+          </a:xfrm>
+          <a:prstGeom prst="roundRect">
+            <a:avLst/>
+          </a:prstGeom>
+          <a:solidFill>
+            <a:srgbClr val="3A564E"/>
+          </a:solidFill>
+          <a:ln>
+            <a:noFill/>
+          </a:ln>
+        </p:spPr>
+        <p:style>
+          <a:lnRef idx="1">
+            <a:schemeClr val="accent1"/>
+          </a:lnRef>
+          <a:fillRef idx="3">
+            <a:schemeClr val="accent1"/>
+          </a:fillRef>
+          <a:effectRef idx="2">
+            <a:schemeClr val="accent1"/>
+          </a:effectRef>
+          <a:fontRef idx="minor">
+            <a:schemeClr val="lt1"/>
+          </a:fontRef>
+        </p:style>
+        <p:txBody>
+          <a:bodyPr rtlCol="0" anchor="ctr"/>
+          <a:lstStyle/>
+          <a:p>
+            <a:pPr algn="ctr"/>
+          </a:p>
+        </p:txBody>
+      </p:sp>
+      <p:sp>
+        <p:nvSpPr>
+          <p:cNvPr id="31" name="TextBox 30"/>
+          <p:cNvSpPr txBox="1"/>
+          <p:nvPr/>
+        </p:nvSpPr>
+        <p:spPr>
+          <a:xfrm>
+            <a:off x="8503920" y="2414016"/>
+            <a:ext cx="457200" cy="274320"/>
+          </a:xfrm>
+          <a:prstGeom prst="rect">
+            <a:avLst/>
+          </a:prstGeom>
+          <a:noFill/>
+        </p:spPr>
+        <p:txBody>
+          <a:bodyPr wrap="square" lIns="0" rIns="0" tIns="0" bIns="0">
+            <a:spAutoFit/>
+          </a:bodyPr>
+          <a:lstStyle/>
+          <a:p>
+            <a:pPr algn="ctr">
+              <a:defRPr sz="1200" b="1">
+                <a:solidFill>
+                  <a:srgbClr val="FFFFFF"/>
+                </a:solidFill>
+                <a:latin typeface="IBM Plex Mono"/>
+              </a:defRPr>
+            </a:pPr>
+            <a:r>
+              <a:t>03</a:t>
+            </a:r>
+          </a:p>
+        </p:txBody>
+      </p:sp>
+      <p:sp>
+        <p:nvSpPr>
+          <p:cNvPr id="32" name="Rounded Rectangle 31"/>
+          <p:cNvSpPr/>
+          <p:nvPr/>
+        </p:nvSpPr>
+        <p:spPr>
+          <a:xfrm>
+            <a:off x="9098280" y="2395728"/>
+            <a:ext cx="868680" cy="292608"/>
+          </a:xfrm>
+          <a:prstGeom prst="roundRect">
+            <a:avLst/>
+          </a:prstGeom>
+          <a:solidFill>
+            <a:srgbClr val="0B2823"/>
+          </a:solidFill>
+          <a:ln>
+            <a:noFill/>
+          </a:ln>
+        </p:spPr>
+        <p:style>
+          <a:lnRef idx="1">
+            <a:schemeClr val="accent1"/>
+          </a:lnRef>
+          <a:fillRef idx="3">
+            <a:schemeClr val="accent1"/>
+          </a:fillRef>
+          <a:effectRef idx="2">
+            <a:schemeClr val="accent1"/>
+          </a:effectRef>
+          <a:fontRef idx="minor">
+            <a:schemeClr val="lt1"/>
+          </a:fontRef>
+        </p:style>
+        <p:txBody>
+          <a:bodyPr rtlCol="0" anchor="ctr"/>
+          <a:lstStyle/>
+          <a:p>
+            <a:pPr algn="ctr"/>
+          </a:p>
+        </p:txBody>
+      </p:sp>
+      <p:sp>
+        <p:nvSpPr>
+          <p:cNvPr id="33" name="TextBox 32"/>
+          <p:cNvSpPr txBox="1"/>
+          <p:nvPr/>
+        </p:nvSpPr>
+        <p:spPr>
+          <a:xfrm>
+            <a:off x="9098280" y="2441448"/>
+            <a:ext cx="868680" cy="228600"/>
+          </a:xfrm>
+          <a:prstGeom prst="rect">
+            <a:avLst/>
+          </a:prstGeom>
+          <a:noFill/>
+        </p:spPr>
+        <p:txBody>
+          <a:bodyPr wrap="square" lIns="0" rIns="0" tIns="0" bIns="0">
+            <a:spAutoFit/>
+          </a:bodyPr>
+          <a:lstStyle/>
+          <a:p>
+            <a:pPr algn="ctr">
+              <a:defRPr sz="900" b="1">
+                <a:solidFill>
+                  <a:srgbClr val="D4C878"/>
+                </a:solidFill>
+                <a:latin typeface="IBM Plex Mono"/>
+              </a:defRPr>
+            </a:pPr>
+            <a:r>
+              <a:t>15 min</a:t>
+            </a:r>
+          </a:p>
+        </p:txBody>
+      </p:sp>
+      <p:sp>
+        <p:nvSpPr>
+          <p:cNvPr id="34" name="TextBox 33"/>
+          <p:cNvSpPr txBox="1"/>
+          <p:nvPr/>
+        </p:nvSpPr>
+        <p:spPr>
+          <a:xfrm>
+            <a:off x="8503920" y="2834640"/>
+            <a:ext cx="3383280" cy="320040"/>
+          </a:xfrm>
+          <a:prstGeom prst="rect">
+            <a:avLst/>
+          </a:prstGeom>
+          <a:noFill/>
+        </p:spPr>
+        <p:txBody>
+          <a:bodyPr wrap="square" lIns="0" rIns="0" tIns="0" bIns="0">
+            <a:spAutoFit/>
+          </a:bodyPr>
+          <a:lstStyle/>
+          <a:p>
+            <a:pPr algn="l">
+              <a:defRPr sz="1400" b="1">
+                <a:solidFill>
+                  <a:srgbClr val="1E1E1E"/>
+                </a:solidFill>
+                <a:latin typeface="Plus Jakarta Sans"/>
+              </a:defRPr>
+            </a:pPr>
+            <a:r>
+              <a:t>Definir tema real</a:t>
+            </a:r>
+          </a:p>
+        </p:txBody>
+      </p:sp>
+      <p:sp>
+        <p:nvSpPr>
+          <p:cNvPr id="35" name="TextBox 34"/>
+          <p:cNvSpPr txBox="1"/>
+          <p:nvPr/>
+        </p:nvSpPr>
+        <p:spPr>
+          <a:xfrm>
+            <a:off x="8503920" y="3154680"/>
+            <a:ext cx="3383280" cy="548640"/>
+          </a:xfrm>
+          <a:prstGeom prst="rect">
+            <a:avLst/>
+          </a:prstGeom>
+          <a:noFill/>
+        </p:spPr>
+        <p:txBody>
+          <a:bodyPr wrap="square" lIns="0" rIns="0" tIns="0" bIns="0">
+            <a:spAutoFit/>
+          </a:bodyPr>
+          <a:lstStyle/>
+          <a:p>
+            <a:pPr algn="l">
+              <a:lnSpc>
+                <a:spcPts val="1400"/>
+              </a:lnSpc>
+              <a:defRPr sz="1000" b="0">
+                <a:solidFill>
+                  <a:srgbClr val="4A4A4A"/>
+                </a:solidFill>
+                <a:latin typeface="Plus Jakarta Sans"/>
+              </a:defRPr>
+            </a:pPr>
+            <a:r>
+              <a:t>Editar memory/project_thesis.md substituindo</a:t>
+            </a:r>
+            <a:br/>
+            <a:r>
+              <a:t>placeholders pela pergunta de pesquisa real.</a:t>
+            </a:r>
+          </a:p>
+        </p:txBody>
+      </p:sp>
+      <p:sp>
+        <p:nvSpPr>
+          <p:cNvPr id="36" name="Rectangle 35"/>
+          <p:cNvSpPr/>
+          <p:nvPr/>
+        </p:nvSpPr>
+        <p:spPr>
+          <a:xfrm>
+            <a:off x="8503920" y="3749040"/>
+            <a:ext cx="365760" cy="19050"/>
+          </a:xfrm>
+          <a:prstGeom prst="rect">
+            <a:avLst/>
+          </a:prstGeom>
+          <a:solidFill>
+            <a:srgbClr val="3A564E"/>
+          </a:solidFill>
+          <a:ln>
+            <a:noFill/>
+          </a:ln>
+        </p:spPr>
+        <p:style>
+          <a:lnRef idx="1">
+            <a:schemeClr val="accent1"/>
+          </a:lnRef>
+          <a:fillRef idx="3">
+            <a:schemeClr val="accent1"/>
+          </a:fillRef>
+          <a:effectRef idx="2">
+            <a:schemeClr val="accent1"/>
+          </a:effectRef>
+          <a:fontRef idx="minor">
+            <a:schemeClr val="lt1"/>
+          </a:fontRef>
+        </p:style>
+        <p:txBody>
+          <a:bodyPr rtlCol="0" anchor="ctr"/>
+          <a:lstStyle/>
+          <a:p>
+            <a:pPr algn="ctr"/>
+          </a:p>
+        </p:txBody>
+      </p:sp>
+      <p:sp>
+        <p:nvSpPr>
+          <p:cNvPr id="37" name="TextBox 36"/>
+          <p:cNvSpPr txBox="1"/>
+          <p:nvPr/>
+        </p:nvSpPr>
+        <p:spPr>
+          <a:xfrm>
+            <a:off x="8503920" y="3794760"/>
+            <a:ext cx="3383280" cy="274320"/>
+          </a:xfrm>
+          <a:prstGeom prst="rect">
+            <a:avLst/>
+          </a:prstGeom>
+          <a:noFill/>
+        </p:spPr>
+        <p:txBody>
+          <a:bodyPr wrap="square" lIns="0" rIns="0" tIns="0" bIns="0">
+            <a:spAutoFit/>
+          </a:bodyPr>
+          <a:lstStyle/>
+          <a:p>
+            <a:pPr algn="l">
+              <a:defRPr sz="800" b="1">
+                <a:solidFill>
+                  <a:srgbClr val="3A564E"/>
+                </a:solidFill>
+                <a:latin typeface="Plus Jakarta Sans"/>
+              </a:defRPr>
+            </a:pPr>
+            <a:r>
+              <a:t>PRONTO QUANDO</a:t>
+            </a:r>
+          </a:p>
+        </p:txBody>
+      </p:sp>
+      <p:sp>
+        <p:nvSpPr>
+          <p:cNvPr id="38" name="TextBox 37"/>
+          <p:cNvSpPr txBox="1"/>
+          <p:nvPr/>
+        </p:nvSpPr>
+        <p:spPr>
+          <a:xfrm>
+            <a:off x="8503920" y="3977640"/>
+            <a:ext cx="3383280" cy="274320"/>
+          </a:xfrm>
+          <a:prstGeom prst="rect">
+            <a:avLst/>
+          </a:prstGeom>
+          <a:noFill/>
+        </p:spPr>
+        <p:txBody>
+          <a:bodyPr wrap="square" lIns="0" rIns="0" tIns="0" bIns="0">
+            <a:spAutoFit/>
+          </a:bodyPr>
+          <a:lstStyle/>
+          <a:p>
+            <a:pPr algn="l">
+              <a:defRPr sz="900" b="0">
+                <a:solidFill>
+                  <a:srgbClr val="4A4A4A"/>
+                </a:solidFill>
+                <a:latin typeface="IBM Plex Mono"/>
+              </a:defRPr>
+            </a:pPr>
+            <a:r>
+              <a:t>Voce le e identifica pergunta + 3 objetivos</a:t>
+            </a:r>
+          </a:p>
+        </p:txBody>
+      </p:sp>
+      <p:sp>
+        <p:nvSpPr>
+          <p:cNvPr id="39" name="Rounded Rectangle 38"/>
+          <p:cNvSpPr/>
+          <p:nvPr/>
+        </p:nvSpPr>
+        <p:spPr>
+          <a:xfrm>
+            <a:off x="640080" y="4251960"/>
+            <a:ext cx="3657600" cy="1920240"/>
+          </a:xfrm>
+          <a:prstGeom prst="roundRect">
+            <a:avLst/>
+          </a:prstGeom>
+          <a:solidFill>
+            <a:srgbClr val="F4F1EA"/>
+          </a:solidFill>
+          <a:ln w="12700">
+            <a:solidFill>
+              <a:srgbClr val="E0DDD5"/>
+            </a:solidFill>
+          </a:ln>
+        </p:spPr>
+        <p:style>
+          <a:lnRef idx="1">
+            <a:schemeClr val="accent1"/>
+          </a:lnRef>
+          <a:fillRef idx="3">
+            <a:schemeClr val="accent1"/>
+          </a:fillRef>
+          <a:effectRef idx="2">
+            <a:schemeClr val="accent1"/>
+          </a:effectRef>
+          <a:fontRef idx="minor">
+            <a:schemeClr val="lt1"/>
+          </a:fontRef>
+        </p:style>
+        <p:txBody>
+          <a:bodyPr rtlCol="0" anchor="ctr"/>
+          <a:lstStyle/>
+          <a:p>
+            <a:pPr algn="ctr"/>
+          </a:p>
+        </p:txBody>
+      </p:sp>
+      <p:sp>
+        <p:nvSpPr>
+          <p:cNvPr id="40" name="Rectangle 39"/>
+          <p:cNvSpPr/>
+          <p:nvPr/>
+        </p:nvSpPr>
+        <p:spPr>
+          <a:xfrm>
+            <a:off x="640080" y="4251960"/>
+            <a:ext cx="3657600" cy="38100"/>
+          </a:xfrm>
+          <a:prstGeom prst="rect">
+            <a:avLst/>
+          </a:prstGeom>
+          <a:solidFill>
+            <a:srgbClr val="0B2823"/>
+          </a:solidFill>
+          <a:ln>
+            <a:noFill/>
+          </a:ln>
+        </p:spPr>
+        <p:style>
+          <a:lnRef idx="1">
+            <a:schemeClr val="accent1"/>
+          </a:lnRef>
+          <a:fillRef idx="3">
+            <a:schemeClr val="accent1"/>
+          </a:fillRef>
+          <a:effectRef idx="2">
+            <a:schemeClr val="accent1"/>
+          </a:effectRef>
+          <a:fontRef idx="minor">
+            <a:schemeClr val="lt1"/>
+          </a:fontRef>
+        </p:style>
+        <p:txBody>
+          <a:bodyPr rtlCol="0" anchor="ctr"/>
+          <a:lstStyle/>
+          <a:p>
+            <a:pPr algn="ctr"/>
+          </a:p>
+        </p:txBody>
+      </p:sp>
+      <p:sp>
+        <p:nvSpPr>
+          <p:cNvPr id="41" name="Rounded Rectangle 40"/>
+          <p:cNvSpPr/>
+          <p:nvPr/>
+        </p:nvSpPr>
+        <p:spPr>
+          <a:xfrm>
+            <a:off x="822960" y="4416552"/>
+            <a:ext cx="457200" cy="384048"/>
+          </a:xfrm>
+          <a:prstGeom prst="roundRect">
+            <a:avLst/>
+          </a:prstGeom>
+          <a:solidFill>
+            <a:srgbClr val="0B2823"/>
+          </a:solidFill>
+          <a:ln>
+            <a:noFill/>
+          </a:ln>
+        </p:spPr>
+        <p:style>
+          <a:lnRef idx="1">
+            <a:schemeClr val="accent1"/>
+          </a:lnRef>
+          <a:fillRef idx="3">
+            <a:schemeClr val="accent1"/>
+          </a:fillRef>
+          <a:effectRef idx="2">
+            <a:schemeClr val="accent1"/>
+          </a:effectRef>
+          <a:fontRef idx="minor">
+            <a:schemeClr val="lt1"/>
+          </a:fontRef>
+        </p:style>
+        <p:txBody>
+          <a:bodyPr rtlCol="0" anchor="ctr"/>
+          <a:lstStyle/>
+          <a:p>
+            <a:pPr algn="ctr"/>
+          </a:p>
+        </p:txBody>
+      </p:sp>
+      <p:sp>
+        <p:nvSpPr>
+          <p:cNvPr id="42" name="TextBox 41"/>
+          <p:cNvSpPr txBox="1"/>
+          <p:nvPr/>
+        </p:nvSpPr>
+        <p:spPr>
+          <a:xfrm>
+            <a:off x="822960" y="4471416"/>
+            <a:ext cx="457200" cy="274320"/>
+          </a:xfrm>
+          <a:prstGeom prst="rect">
+            <a:avLst/>
+          </a:prstGeom>
+          <a:noFill/>
+        </p:spPr>
+        <p:txBody>
+          <a:bodyPr wrap="square" lIns="0" rIns="0" tIns="0" bIns="0">
+            <a:spAutoFit/>
+          </a:bodyPr>
+          <a:lstStyle/>
+          <a:p>
+            <a:pPr algn="ctr">
+              <a:defRPr sz="1200" b="1">
+                <a:solidFill>
+                  <a:srgbClr val="FFFFFF"/>
+                </a:solidFill>
+                <a:latin typeface="IBM Plex Mono"/>
+              </a:defRPr>
+            </a:pPr>
+            <a:r>
+              <a:t>04</a:t>
+            </a:r>
+          </a:p>
+        </p:txBody>
+      </p:sp>
+      <p:sp>
+        <p:nvSpPr>
+          <p:cNvPr id="43" name="Rounded Rectangle 42"/>
+          <p:cNvSpPr/>
+          <p:nvPr/>
+        </p:nvSpPr>
+        <p:spPr>
+          <a:xfrm>
+            <a:off x="1417320" y="4453128"/>
+            <a:ext cx="868680" cy="292608"/>
+          </a:xfrm>
+          <a:prstGeom prst="roundRect">
+            <a:avLst/>
+          </a:prstGeom>
+          <a:solidFill>
+            <a:srgbClr val="0B2823"/>
+          </a:solidFill>
+          <a:ln>
+            <a:noFill/>
+          </a:ln>
+        </p:spPr>
+        <p:style>
+          <a:lnRef idx="1">
+            <a:schemeClr val="accent1"/>
+          </a:lnRef>
+          <a:fillRef idx="3">
+            <a:schemeClr val="accent1"/>
+          </a:fillRef>
+          <a:effectRef idx="2">
+            <a:schemeClr val="accent1"/>
+          </a:effectRef>
+          <a:fontRef idx="minor">
+            <a:schemeClr val="lt1"/>
+          </a:fontRef>
+        </p:style>
+        <p:txBody>
+          <a:bodyPr rtlCol="0" anchor="ctr"/>
+          <a:lstStyle/>
+          <a:p>
+            <a:pPr algn="ctr"/>
+          </a:p>
+        </p:txBody>
+      </p:sp>
+      <p:sp>
+        <p:nvSpPr>
+          <p:cNvPr id="44" name="TextBox 43"/>
+          <p:cNvSpPr txBox="1"/>
+          <p:nvPr/>
+        </p:nvSpPr>
+        <p:spPr>
+          <a:xfrm>
+            <a:off x="1417320" y="4498848"/>
+            <a:ext cx="868680" cy="228600"/>
+          </a:xfrm>
+          <a:prstGeom prst="rect">
+            <a:avLst/>
+          </a:prstGeom>
+          <a:noFill/>
+        </p:spPr>
+        <p:txBody>
+          <a:bodyPr wrap="square" lIns="0" rIns="0" tIns="0" bIns="0">
+            <a:spAutoFit/>
+          </a:bodyPr>
+          <a:lstStyle/>
+          <a:p>
+            <a:pPr algn="ctr">
+              <a:defRPr sz="900" b="1">
+                <a:solidFill>
+                  <a:srgbClr val="D4C878"/>
+                </a:solidFill>
+                <a:latin typeface="IBM Plex Mono"/>
+              </a:defRPr>
+            </a:pPr>
+            <a:r>
+              <a:t>1-2 h</a:t>
+            </a:r>
+          </a:p>
+        </p:txBody>
+      </p:sp>
+      <p:sp>
+        <p:nvSpPr>
+          <p:cNvPr id="45" name="TextBox 44"/>
+          <p:cNvSpPr txBox="1"/>
+          <p:nvPr/>
+        </p:nvSpPr>
+        <p:spPr>
+          <a:xfrm>
+            <a:off x="822960" y="4892040"/>
+            <a:ext cx="3383280" cy="320040"/>
+          </a:xfrm>
+          <a:prstGeom prst="rect">
+            <a:avLst/>
+          </a:prstGeom>
+          <a:noFill/>
+        </p:spPr>
+        <p:txBody>
+          <a:bodyPr wrap="square" lIns="0" rIns="0" tIns="0" bIns="0">
+            <a:spAutoFit/>
+          </a:bodyPr>
+          <a:lstStyle/>
+          <a:p>
+            <a:pPr algn="l">
+              <a:defRPr sz="1400" b="1">
+                <a:solidFill>
+                  <a:srgbClr val="1E1E1E"/>
+                </a:solidFill>
+                <a:latin typeface="Plus Jakarta Sans"/>
+              </a:defRPr>
+            </a:pPr>
+            <a:r>
+              <a:t>Primeiro ciclo CODE</a:t>
+            </a:r>
+          </a:p>
+        </p:txBody>
+      </p:sp>
+      <p:sp>
+        <p:nvSpPr>
+          <p:cNvPr id="46" name="TextBox 45"/>
+          <p:cNvSpPr txBox="1"/>
+          <p:nvPr/>
+        </p:nvSpPr>
+        <p:spPr>
+          <a:xfrm>
+            <a:off x="822960" y="5212080"/>
+            <a:ext cx="3383280" cy="548640"/>
+          </a:xfrm>
+          <a:prstGeom prst="rect">
+            <a:avLst/>
+          </a:prstGeom>
+          <a:noFill/>
+        </p:spPr>
+        <p:txBody>
+          <a:bodyPr wrap="square" lIns="0" rIns="0" tIns="0" bIns="0">
+            <a:spAutoFit/>
+          </a:bodyPr>
+          <a:lstStyle/>
+          <a:p>
+            <a:pPr algn="l">
+              <a:lnSpc>
+                <a:spcPts val="1400"/>
+              </a:lnSpc>
+              <a:defRPr sz="1000" b="0">
+                <a:solidFill>
+                  <a:srgbClr val="4A4A4A"/>
+                </a:solidFill>
+                <a:latin typeface="Plus Jakarta Sans"/>
+              </a:defRPr>
+            </a:pPr>
+            <a:r>
+              <a:t>researcher &gt; validator &gt; manager &gt; architect.</a:t>
+            </a:r>
+            <a:br/>
+            <a:r>
+              <a:t>5 fontes ate 5 notas atomicas linkadas.</a:t>
+            </a:r>
+          </a:p>
+        </p:txBody>
+      </p:sp>
+      <p:sp>
+        <p:nvSpPr>
+          <p:cNvPr id="47" name="Rectangle 46"/>
+          <p:cNvSpPr/>
+          <p:nvPr/>
+        </p:nvSpPr>
+        <p:spPr>
+          <a:xfrm>
+            <a:off x="822960" y="5806440"/>
+            <a:ext cx="365760" cy="19050"/>
+          </a:xfrm>
+          <a:prstGeom prst="rect">
+            <a:avLst/>
+          </a:prstGeom>
+          <a:solidFill>
+            <a:srgbClr val="0B2823"/>
+          </a:solidFill>
+          <a:ln>
+            <a:noFill/>
+          </a:ln>
+        </p:spPr>
+        <p:style>
+          <a:lnRef idx="1">
+            <a:schemeClr val="accent1"/>
+          </a:lnRef>
+          <a:fillRef idx="3">
+            <a:schemeClr val="accent1"/>
+          </a:fillRef>
+          <a:effectRef idx="2">
+            <a:schemeClr val="accent1"/>
+          </a:effectRef>
+          <a:fontRef idx="minor">
+            <a:schemeClr val="lt1"/>
+          </a:fontRef>
+        </p:style>
+        <p:txBody>
+          <a:bodyPr rtlCol="0" anchor="ctr"/>
+          <a:lstStyle/>
+          <a:p>
+            <a:pPr algn="ctr"/>
+          </a:p>
+        </p:txBody>
+      </p:sp>
+      <p:sp>
+        <p:nvSpPr>
+          <p:cNvPr id="48" name="TextBox 47"/>
+          <p:cNvSpPr txBox="1"/>
+          <p:nvPr/>
+        </p:nvSpPr>
+        <p:spPr>
+          <a:xfrm>
+            <a:off x="822960" y="5852160"/>
+            <a:ext cx="3383280" cy="274320"/>
+          </a:xfrm>
+          <a:prstGeom prst="rect">
+            <a:avLst/>
+          </a:prstGeom>
+          <a:noFill/>
+        </p:spPr>
+        <p:txBody>
+          <a:bodyPr wrap="square" lIns="0" rIns="0" tIns="0" bIns="0">
+            <a:spAutoFit/>
+          </a:bodyPr>
+          <a:lstStyle/>
+          <a:p>
+            <a:pPr algn="l">
+              <a:defRPr sz="800" b="1">
+                <a:solidFill>
+                  <a:srgbClr val="0B2823"/>
+                </a:solidFill>
+                <a:latin typeface="Plus Jakarta Sans"/>
+              </a:defRPr>
+            </a:pPr>
+            <a:r>
+              <a:t>PRONTO QUANDO</a:t>
+            </a:r>
+          </a:p>
+        </p:txBody>
+      </p:sp>
+      <p:sp>
+        <p:nvSpPr>
+          <p:cNvPr id="49" name="TextBox 48"/>
+          <p:cNvSpPr txBox="1"/>
+          <p:nvPr/>
+        </p:nvSpPr>
+        <p:spPr>
+          <a:xfrm>
+            <a:off x="822960" y="6035040"/>
+            <a:ext cx="3383280" cy="274320"/>
+          </a:xfrm>
+          <a:prstGeom prst="rect">
+            <a:avLst/>
+          </a:prstGeom>
+          <a:noFill/>
+        </p:spPr>
+        <p:txBody>
+          <a:bodyPr wrap="square" lIns="0" rIns="0" tIns="0" bIns="0">
+            <a:spAutoFit/>
+          </a:bodyPr>
+          <a:lstStyle/>
+          <a:p>
+            <a:pPr algn="l">
+              <a:defRPr sz="900" b="0">
+                <a:solidFill>
+                  <a:srgbClr val="4A4A4A"/>
+                </a:solidFill>
+                <a:latin typeface="IBM Plex Mono"/>
+              </a:defRPr>
+            </a:pPr>
+            <a:r>
+              <a:t>biblio.bib com 5 entradas + 3-5 notas</a:t>
+            </a:r>
+          </a:p>
+        </p:txBody>
+      </p:sp>
+      <p:sp>
+        <p:nvSpPr>
+          <p:cNvPr id="50" name="Rounded Rectangle 49"/>
+          <p:cNvSpPr/>
+          <p:nvPr/>
+        </p:nvSpPr>
+        <p:spPr>
+          <a:xfrm>
+            <a:off x="4480560" y="4251960"/>
+            <a:ext cx="3657600" cy="1920240"/>
+          </a:xfrm>
+          <a:prstGeom prst="roundRect">
+            <a:avLst/>
+          </a:prstGeom>
+          <a:solidFill>
+            <a:srgbClr val="F4F1EA"/>
+          </a:solidFill>
+          <a:ln w="12700">
+            <a:solidFill>
+              <a:srgbClr val="E0DDD5"/>
+            </a:solidFill>
+          </a:ln>
+        </p:spPr>
+        <p:style>
+          <a:lnRef idx="1">
+            <a:schemeClr val="accent1"/>
+          </a:lnRef>
+          <a:fillRef idx="3">
+            <a:schemeClr val="accent1"/>
+          </a:fillRef>
+          <a:effectRef idx="2">
+            <a:schemeClr val="accent1"/>
+          </a:effectRef>
+          <a:fontRef idx="minor">
+            <a:schemeClr val="lt1"/>
+          </a:fontRef>
+        </p:style>
+        <p:txBody>
+          <a:bodyPr rtlCol="0" anchor="ctr"/>
+          <a:lstStyle/>
+          <a:p>
+            <a:pPr algn="ctr"/>
+          </a:p>
+        </p:txBody>
+      </p:sp>
+      <p:sp>
+        <p:nvSpPr>
+          <p:cNvPr id="51" name="Rectangle 50"/>
+          <p:cNvSpPr/>
+          <p:nvPr/>
+        </p:nvSpPr>
+        <p:spPr>
+          <a:xfrm>
+            <a:off x="4480560" y="4251960"/>
+            <a:ext cx="3657600" cy="38100"/>
+          </a:xfrm>
+          <a:prstGeom prst="rect">
+            <a:avLst/>
+          </a:prstGeom>
+          <a:solidFill>
+            <a:srgbClr val="2D6E43"/>
+          </a:solidFill>
+          <a:ln>
+            <a:noFill/>
+          </a:ln>
+        </p:spPr>
+        <p:style>
+          <a:lnRef idx="1">
+            <a:schemeClr val="accent1"/>
+          </a:lnRef>
+          <a:fillRef idx="3">
+            <a:schemeClr val="accent1"/>
+          </a:fillRef>
+          <a:effectRef idx="2">
+            <a:schemeClr val="accent1"/>
+          </a:effectRef>
+          <a:fontRef idx="minor">
+            <a:schemeClr val="lt1"/>
+          </a:fontRef>
+        </p:style>
+        <p:txBody>
+          <a:bodyPr rtlCol="0" anchor="ctr"/>
+          <a:lstStyle/>
+          <a:p>
+            <a:pPr algn="ctr"/>
+          </a:p>
+        </p:txBody>
+      </p:sp>
+      <p:sp>
+        <p:nvSpPr>
+          <p:cNvPr id="52" name="Rounded Rectangle 51"/>
+          <p:cNvSpPr/>
+          <p:nvPr/>
+        </p:nvSpPr>
+        <p:spPr>
+          <a:xfrm>
+            <a:off x="4663440" y="4416552"/>
+            <a:ext cx="457200" cy="384048"/>
+          </a:xfrm>
+          <a:prstGeom prst="roundRect">
+            <a:avLst/>
+          </a:prstGeom>
+          <a:solidFill>
+            <a:srgbClr val="2D6E43"/>
+          </a:solidFill>
+          <a:ln>
+            <a:noFill/>
+          </a:ln>
+        </p:spPr>
+        <p:style>
+          <a:lnRef idx="1">
+            <a:schemeClr val="accent1"/>
+          </a:lnRef>
+          <a:fillRef idx="3">
+            <a:schemeClr val="accent1"/>
+          </a:fillRef>
+          <a:effectRef idx="2">
+            <a:schemeClr val="accent1"/>
+          </a:effectRef>
+          <a:fontRef idx="minor">
+            <a:schemeClr val="lt1"/>
+          </a:fontRef>
+        </p:style>
+        <p:txBody>
+          <a:bodyPr rtlCol="0" anchor="ctr"/>
+          <a:lstStyle/>
+          <a:p>
+            <a:pPr algn="ctr"/>
+          </a:p>
+        </p:txBody>
+      </p:sp>
+      <p:sp>
+        <p:nvSpPr>
+          <p:cNvPr id="53" name="TextBox 52"/>
+          <p:cNvSpPr txBox="1"/>
+          <p:nvPr/>
+        </p:nvSpPr>
+        <p:spPr>
+          <a:xfrm>
+            <a:off x="4663440" y="4471416"/>
+            <a:ext cx="457200" cy="274320"/>
+          </a:xfrm>
+          <a:prstGeom prst="rect">
+            <a:avLst/>
+          </a:prstGeom>
+          <a:noFill/>
+        </p:spPr>
+        <p:txBody>
+          <a:bodyPr wrap="square" lIns="0" rIns="0" tIns="0" bIns="0">
+            <a:spAutoFit/>
+          </a:bodyPr>
+          <a:lstStyle/>
+          <a:p>
+            <a:pPr algn="ctr">
+              <a:defRPr sz="1200" b="1">
+                <a:solidFill>
+                  <a:srgbClr val="FFFFFF"/>
+                </a:solidFill>
+                <a:latin typeface="IBM Plex Mono"/>
+              </a:defRPr>
+            </a:pPr>
+            <a:r>
+              <a:t>05</a:t>
+            </a:r>
+          </a:p>
+        </p:txBody>
+      </p:sp>
+      <p:sp>
+        <p:nvSpPr>
+          <p:cNvPr id="54" name="Rounded Rectangle 53"/>
+          <p:cNvSpPr/>
+          <p:nvPr/>
+        </p:nvSpPr>
+        <p:spPr>
+          <a:xfrm>
+            <a:off x="5257800" y="4453128"/>
+            <a:ext cx="868680" cy="292608"/>
+          </a:xfrm>
+          <a:prstGeom prst="roundRect">
+            <a:avLst/>
+          </a:prstGeom>
+          <a:solidFill>
+            <a:srgbClr val="0B2823"/>
+          </a:solidFill>
+          <a:ln>
+            <a:noFill/>
+          </a:ln>
+        </p:spPr>
+        <p:style>
+          <a:lnRef idx="1">
+            <a:schemeClr val="accent1"/>
+          </a:lnRef>
+          <a:fillRef idx="3">
+            <a:schemeClr val="accent1"/>
+          </a:fillRef>
+          <a:effectRef idx="2">
+            <a:schemeClr val="accent1"/>
+          </a:effectRef>
+          <a:fontRef idx="minor">
+            <a:schemeClr val="lt1"/>
+          </a:fontRef>
+        </p:style>
+        <p:txBody>
+          <a:bodyPr rtlCol="0" anchor="ctr"/>
+          <a:lstStyle/>
+          <a:p>
+            <a:pPr algn="ctr"/>
+          </a:p>
+        </p:txBody>
+      </p:sp>
+      <p:sp>
+        <p:nvSpPr>
+          <p:cNvPr id="55" name="TextBox 54"/>
+          <p:cNvSpPr txBox="1"/>
+          <p:nvPr/>
+        </p:nvSpPr>
+        <p:spPr>
+          <a:xfrm>
+            <a:off x="5257800" y="4498848"/>
+            <a:ext cx="868680" cy="228600"/>
+          </a:xfrm>
+          <a:prstGeom prst="rect">
+            <a:avLst/>
+          </a:prstGeom>
+          <a:noFill/>
+        </p:spPr>
+        <p:txBody>
+          <a:bodyPr wrap="square" lIns="0" rIns="0" tIns="0" bIns="0">
+            <a:spAutoFit/>
+          </a:bodyPr>
+          <a:lstStyle/>
+          <a:p>
+            <a:pPr algn="ctr">
+              <a:defRPr sz="900" b="1">
+                <a:solidFill>
+                  <a:srgbClr val="D4C878"/>
+                </a:solidFill>
+                <a:latin typeface="IBM Plex Mono"/>
+              </a:defRPr>
+            </a:pPr>
+            <a:r>
+              <a:t>30 min</a:t>
+            </a:r>
+          </a:p>
+        </p:txBody>
+      </p:sp>
+      <p:sp>
+        <p:nvSpPr>
+          <p:cNvPr id="56" name="TextBox 55"/>
+          <p:cNvSpPr txBox="1"/>
+          <p:nvPr/>
+        </p:nvSpPr>
+        <p:spPr>
+          <a:xfrm>
+            <a:off x="4663440" y="4892040"/>
+            <a:ext cx="3383280" cy="320040"/>
+          </a:xfrm>
+          <a:prstGeom prst="rect">
+            <a:avLst/>
+          </a:prstGeom>
+          <a:noFill/>
+        </p:spPr>
+        <p:txBody>
+          <a:bodyPr wrap="square" lIns="0" rIns="0" tIns="0" bIns="0">
+            <a:spAutoFit/>
+          </a:bodyPr>
+          <a:lstStyle/>
+          <a:p>
+            <a:pPr algn="l">
+              <a:defRPr sz="1400" b="1">
+                <a:solidFill>
+                  <a:srgbClr val="1E1E1E"/>
+                </a:solidFill>
+                <a:latin typeface="Plus Jakarta Sans"/>
+              </a:defRPr>
+            </a:pPr>
+            <a:r>
+              <a:t>Instalar Obsidian</a:t>
+            </a:r>
+          </a:p>
+        </p:txBody>
+      </p:sp>
+      <p:sp>
+        <p:nvSpPr>
+          <p:cNvPr id="57" name="TextBox 56"/>
+          <p:cNvSpPr txBox="1"/>
+          <p:nvPr/>
+        </p:nvSpPr>
+        <p:spPr>
+          <a:xfrm>
+            <a:off x="4663440" y="5212080"/>
+            <a:ext cx="3383280" cy="548640"/>
+          </a:xfrm>
+          <a:prstGeom prst="rect">
+            <a:avLst/>
+          </a:prstGeom>
+          <a:noFill/>
+        </p:spPr>
+        <p:txBody>
+          <a:bodyPr wrap="square" lIns="0" rIns="0" tIns="0" bIns="0">
+            <a:spAutoFit/>
+          </a:bodyPr>
+          <a:lstStyle/>
+          <a:p>
+            <a:pPr algn="l">
+              <a:lnSpc>
+                <a:spcPts val="1400"/>
+              </a:lnSpc>
+              <a:defRPr sz="1000" b="0">
+                <a:solidFill>
+                  <a:srgbClr val="4A4A4A"/>
+                </a:solidFill>
+                <a:latin typeface="Plus Jakarta Sans"/>
+              </a:defRPr>
+            </a:pPr>
+            <a:r>
+              <a:t>Opcional mas muito recomendado.</a:t>
+            </a:r>
+            <a:br/>
+            <a:r>
+              <a:t>Seguir docs/obsidian-setup-guide.md.</a:t>
+            </a:r>
+          </a:p>
+        </p:txBody>
+      </p:sp>
+      <p:sp>
+        <p:nvSpPr>
+          <p:cNvPr id="58" name="Rectangle 57"/>
+          <p:cNvSpPr/>
+          <p:nvPr/>
+        </p:nvSpPr>
+        <p:spPr>
+          <a:xfrm>
+            <a:off x="4663440" y="5806440"/>
+            <a:ext cx="365760" cy="19050"/>
+          </a:xfrm>
+          <a:prstGeom prst="rect">
+            <a:avLst/>
+          </a:prstGeom>
+          <a:solidFill>
+            <a:srgbClr val="2D6E43"/>
+          </a:solidFill>
+          <a:ln>
+            <a:noFill/>
+          </a:ln>
+        </p:spPr>
+        <p:style>
+          <a:lnRef idx="1">
+            <a:schemeClr val="accent1"/>
+          </a:lnRef>
+          <a:fillRef idx="3">
+            <a:schemeClr val="accent1"/>
+          </a:fillRef>
+          <a:effectRef idx="2">
+            <a:schemeClr val="accent1"/>
+          </a:effectRef>
+          <a:fontRef idx="minor">
+            <a:schemeClr val="lt1"/>
+          </a:fontRef>
+        </p:style>
+        <p:txBody>
+          <a:bodyPr rtlCol="0" anchor="ctr"/>
+          <a:lstStyle/>
+          <a:p>
+            <a:pPr algn="ctr"/>
+          </a:p>
+        </p:txBody>
+      </p:sp>
+      <p:sp>
+        <p:nvSpPr>
+          <p:cNvPr id="59" name="TextBox 58"/>
+          <p:cNvSpPr txBox="1"/>
+          <p:nvPr/>
+        </p:nvSpPr>
+        <p:spPr>
+          <a:xfrm>
+            <a:off x="4663440" y="5852160"/>
+            <a:ext cx="3383280" cy="274320"/>
+          </a:xfrm>
+          <a:prstGeom prst="rect">
+            <a:avLst/>
+          </a:prstGeom>
+          <a:noFill/>
+        </p:spPr>
+        <p:txBody>
+          <a:bodyPr wrap="square" lIns="0" rIns="0" tIns="0" bIns="0">
+            <a:spAutoFit/>
+          </a:bodyPr>
+          <a:lstStyle/>
+          <a:p>
+            <a:pPr algn="l">
+              <a:defRPr sz="800" b="1">
+                <a:solidFill>
+                  <a:srgbClr val="2D6E43"/>
+                </a:solidFill>
+                <a:latin typeface="Plus Jakarta Sans"/>
+              </a:defRPr>
+            </a:pPr>
+            <a:r>
+              <a:t>PRONTO QUANDO</a:t>
+            </a:r>
+          </a:p>
+        </p:txBody>
+      </p:sp>
+      <p:sp>
+        <p:nvSpPr>
+          <p:cNvPr id="60" name="TextBox 59"/>
+          <p:cNvSpPr txBox="1"/>
+          <p:nvPr/>
+        </p:nvSpPr>
+        <p:spPr>
+          <a:xfrm>
+            <a:off x="4663440" y="6035040"/>
+            <a:ext cx="3383280" cy="274320"/>
+          </a:xfrm>
+          <a:prstGeom prst="rect">
+            <a:avLst/>
+          </a:prstGeom>
+          <a:noFill/>
+        </p:spPr>
+        <p:txBody>
+          <a:bodyPr wrap="square" lIns="0" rIns="0" tIns="0" bIns="0">
+            <a:spAutoFit/>
+          </a:bodyPr>
+          <a:lstStyle/>
+          <a:p>
+            <a:pPr algn="l">
+              <a:defRPr sz="900" b="0">
+                <a:solidFill>
+                  <a:srgbClr val="4A4A4A"/>
+                </a:solidFill>
+                <a:latin typeface="IBM Plex Mono"/>
+              </a:defRPr>
+            </a:pPr>
+            <a:r>
+              <a:t>Grafo (Ctrl+G) abre com 5+ notas</a:t>
+            </a:r>
+          </a:p>
+        </p:txBody>
+      </p:sp>
+      <p:sp>
+        <p:nvSpPr>
+          <p:cNvPr id="61" name="Rounded Rectangle 60"/>
+          <p:cNvSpPr/>
+          <p:nvPr/>
+        </p:nvSpPr>
+        <p:spPr>
+          <a:xfrm>
+            <a:off x="8321040" y="4251960"/>
+            <a:ext cx="3657600" cy="1920240"/>
+          </a:xfrm>
+          <a:prstGeom prst="roundRect">
+            <a:avLst/>
+          </a:prstGeom>
+          <a:solidFill>
+            <a:srgbClr val="F4F1EA"/>
+          </a:solidFill>
+          <a:ln w="12700">
+            <a:solidFill>
+              <a:srgbClr val="E0DDD5"/>
+            </a:solidFill>
+          </a:ln>
+        </p:spPr>
+        <p:style>
+          <a:lnRef idx="1">
+            <a:schemeClr val="accent1"/>
+          </a:lnRef>
+          <a:fillRef idx="3">
+            <a:schemeClr val="accent1"/>
+          </a:fillRef>
+          <a:effectRef idx="2">
+            <a:schemeClr val="accent1"/>
+          </a:effectRef>
+          <a:fontRef idx="minor">
+            <a:schemeClr val="lt1"/>
+          </a:fontRef>
+        </p:style>
+        <p:txBody>
+          <a:bodyPr rtlCol="0" anchor="ctr"/>
+          <a:lstStyle/>
+          <a:p>
+            <a:pPr algn="ctr"/>
+          </a:p>
+        </p:txBody>
+      </p:sp>
+      <p:sp>
+        <p:nvSpPr>
+          <p:cNvPr id="62" name="Rectangle 61"/>
+          <p:cNvSpPr/>
+          <p:nvPr/>
+        </p:nvSpPr>
+        <p:spPr>
+          <a:xfrm>
+            <a:off x="8321040" y="4251960"/>
+            <a:ext cx="3657600" cy="38100"/>
+          </a:xfrm>
+          <a:prstGeom prst="rect">
+            <a:avLst/>
+          </a:prstGeom>
+          <a:solidFill>
+            <a:srgbClr val="D48B1F"/>
+          </a:solidFill>
+          <a:ln>
+            <a:noFill/>
+          </a:ln>
+        </p:spPr>
+        <p:style>
+          <a:lnRef idx="1">
+            <a:schemeClr val="accent1"/>
+          </a:lnRef>
+          <a:fillRef idx="3">
+            <a:schemeClr val="accent1"/>
+          </a:fillRef>
+          <a:effectRef idx="2">
+            <a:schemeClr val="accent1"/>
+          </a:effectRef>
+          <a:fontRef idx="minor">
+            <a:schemeClr val="lt1"/>
+          </a:fontRef>
+        </p:style>
+        <p:txBody>
+          <a:bodyPr rtlCol="0" anchor="ctr"/>
+          <a:lstStyle/>
+          <a:p>
+            <a:pPr algn="ctr"/>
+          </a:p>
+        </p:txBody>
+      </p:sp>
+      <p:sp>
+        <p:nvSpPr>
+          <p:cNvPr id="63" name="Rounded Rectangle 62"/>
+          <p:cNvSpPr/>
+          <p:nvPr/>
+        </p:nvSpPr>
+        <p:spPr>
+          <a:xfrm>
+            <a:off x="8503920" y="4416552"/>
+            <a:ext cx="457200" cy="384048"/>
+          </a:xfrm>
+          <a:prstGeom prst="roundRect">
+            <a:avLst/>
+          </a:prstGeom>
+          <a:solidFill>
+            <a:srgbClr val="D48B1F"/>
+          </a:solidFill>
+          <a:ln>
+            <a:noFill/>
+          </a:ln>
+        </p:spPr>
+        <p:style>
+          <a:lnRef idx="1">
+            <a:schemeClr val="accent1"/>
+          </a:lnRef>
+          <a:fillRef idx="3">
+            <a:schemeClr val="accent1"/>
+          </a:fillRef>
+          <a:effectRef idx="2">
+            <a:schemeClr val="accent1"/>
+          </a:effectRef>
+          <a:fontRef idx="minor">
+            <a:schemeClr val="lt1"/>
+          </a:fontRef>
+        </p:style>
+        <p:txBody>
+          <a:bodyPr rtlCol="0" anchor="ctr"/>
+          <a:lstStyle/>
+          <a:p>
+            <a:pPr algn="ctr"/>
+          </a:p>
+        </p:txBody>
+      </p:sp>
+      <p:sp>
+        <p:nvSpPr>
+          <p:cNvPr id="64" name="TextBox 63"/>
+          <p:cNvSpPr txBox="1"/>
+          <p:nvPr/>
+        </p:nvSpPr>
+        <p:spPr>
+          <a:xfrm>
+            <a:off x="8503920" y="4471416"/>
+            <a:ext cx="457200" cy="274320"/>
+          </a:xfrm>
+          <a:prstGeom prst="rect">
+            <a:avLst/>
+          </a:prstGeom>
+          <a:noFill/>
+        </p:spPr>
+        <p:txBody>
+          <a:bodyPr wrap="square" lIns="0" rIns="0" tIns="0" bIns="0">
+            <a:spAutoFit/>
+          </a:bodyPr>
+          <a:lstStyle/>
+          <a:p>
+            <a:pPr algn="ctr">
+              <a:defRPr sz="1200" b="1">
+                <a:solidFill>
+                  <a:srgbClr val="FFFFFF"/>
+                </a:solidFill>
+                <a:latin typeface="IBM Plex Mono"/>
+              </a:defRPr>
+            </a:pPr>
+            <a:r>
+              <a:t>06</a:t>
+            </a:r>
+          </a:p>
+        </p:txBody>
+      </p:sp>
+      <p:sp>
+        <p:nvSpPr>
+          <p:cNvPr id="65" name="Rounded Rectangle 64"/>
+          <p:cNvSpPr/>
+          <p:nvPr/>
+        </p:nvSpPr>
+        <p:spPr>
+          <a:xfrm>
+            <a:off x="9098280" y="4453128"/>
+            <a:ext cx="868680" cy="292608"/>
+          </a:xfrm>
+          <a:prstGeom prst="roundRect">
+            <a:avLst/>
+          </a:prstGeom>
+          <a:solidFill>
+            <a:srgbClr val="0B2823"/>
+          </a:solidFill>
+          <a:ln>
+            <a:noFill/>
+          </a:ln>
+        </p:spPr>
+        <p:style>
+          <a:lnRef idx="1">
+            <a:schemeClr val="accent1"/>
+          </a:lnRef>
+          <a:fillRef idx="3">
+            <a:schemeClr val="accent1"/>
+          </a:fillRef>
+          <a:effectRef idx="2">
+            <a:schemeClr val="accent1"/>
+          </a:effectRef>
+          <a:fontRef idx="minor">
+            <a:schemeClr val="lt1"/>
+          </a:fontRef>
+        </p:style>
+        <p:txBody>
+          <a:bodyPr rtlCol="0" anchor="ctr"/>
+          <a:lstStyle/>
+          <a:p>
+            <a:pPr algn="ctr"/>
+          </a:p>
+        </p:txBody>
+      </p:sp>
+      <p:sp>
+        <p:nvSpPr>
+          <p:cNvPr id="66" name="TextBox 65"/>
+          <p:cNvSpPr txBox="1"/>
+          <p:nvPr/>
+        </p:nvSpPr>
+        <p:spPr>
+          <a:xfrm>
+            <a:off x="9098280" y="4498848"/>
+            <a:ext cx="868680" cy="228600"/>
+          </a:xfrm>
+          <a:prstGeom prst="rect">
+            <a:avLst/>
+          </a:prstGeom>
+          <a:noFill/>
+        </p:spPr>
+        <p:txBody>
+          <a:bodyPr wrap="square" lIns="0" rIns="0" tIns="0" bIns="0">
+            <a:spAutoFit/>
+          </a:bodyPr>
+          <a:lstStyle/>
+          <a:p>
+            <a:pPr algn="ctr">
+              <a:defRPr sz="900" b="1">
+                <a:solidFill>
+                  <a:srgbClr val="D4C878"/>
+                </a:solidFill>
+                <a:latin typeface="IBM Plex Mono"/>
+              </a:defRPr>
+            </a:pPr>
+            <a:r>
+              <a:t>1 semana</a:t>
+            </a:r>
+          </a:p>
+        </p:txBody>
+      </p:sp>
+      <p:sp>
+        <p:nvSpPr>
+          <p:cNvPr id="67" name="TextBox 66"/>
+          <p:cNvSpPr txBox="1"/>
+          <p:nvPr/>
+        </p:nvSpPr>
+        <p:spPr>
+          <a:xfrm>
+            <a:off x="8503920" y="4892040"/>
+            <a:ext cx="3383280" cy="320040"/>
+          </a:xfrm>
+          <a:prstGeom prst="rect">
+            <a:avLst/>
+          </a:prstGeom>
+          <a:noFill/>
+        </p:spPr>
+        <p:txBody>
+          <a:bodyPr wrap="square" lIns="0" rIns="0" tIns="0" bIns="0">
+            <a:spAutoFit/>
+          </a:bodyPr>
+          <a:lstStyle/>
+          <a:p>
+            <a:pPr algn="l">
+              <a:defRPr sz="1400" b="1">
+                <a:solidFill>
+                  <a:srgbClr val="1E1E1E"/>
+                </a:solidFill>
+                <a:latin typeface="Plus Jakarta Sans"/>
+              </a:defRPr>
+            </a:pPr>
+            <a:r>
+              <a:t>Primeira mini-secao</a:t>
+            </a:r>
+          </a:p>
+        </p:txBody>
+      </p:sp>
+      <p:sp>
+        <p:nvSpPr>
+          <p:cNvPr id="68" name="TextBox 67"/>
+          <p:cNvSpPr txBox="1"/>
+          <p:nvPr/>
+        </p:nvSpPr>
+        <p:spPr>
+          <a:xfrm>
+            <a:off x="8503920" y="5212080"/>
+            <a:ext cx="3383280" cy="548640"/>
+          </a:xfrm>
+          <a:prstGeom prst="rect">
+            <a:avLst/>
+          </a:prstGeom>
+          <a:noFill/>
+        </p:spPr>
+        <p:txBody>
+          <a:bodyPr wrap="square" lIns="0" rIns="0" tIns="0" bIns="0">
+            <a:spAutoFit/>
+          </a:bodyPr>
+          <a:lstStyle/>
+          <a:p>
+            <a:pPr algn="l">
+              <a:lnSpc>
+                <a:spcPts val="1400"/>
+              </a:lnSpc>
+              <a:defRPr sz="1000" b="0">
+                <a:solidFill>
+                  <a:srgbClr val="4A4A4A"/>
+                </a:solidFill>
+                <a:latin typeface="Plus Jakarta Sans"/>
+              </a:defRPr>
+            </a:pPr>
+            <a:r>
+              <a:t>Sprint completo: writer &gt; validator &gt; auditor</a:t>
+            </a:r>
+            <a:br/>
+            <a:r>
+              <a:t>&gt; humanizer &gt; peer-reviewer (~1500 palavras).</a:t>
+            </a:r>
+          </a:p>
+        </p:txBody>
+      </p:sp>
+      <p:sp>
+        <p:nvSpPr>
+          <p:cNvPr id="69" name="Rectangle 68"/>
+          <p:cNvSpPr/>
+          <p:nvPr/>
+        </p:nvSpPr>
+        <p:spPr>
+          <a:xfrm>
+            <a:off x="8503920" y="5806440"/>
+            <a:ext cx="365760" cy="19050"/>
+          </a:xfrm>
+          <a:prstGeom prst="rect">
+            <a:avLst/>
+          </a:prstGeom>
+          <a:solidFill>
+            <a:srgbClr val="D48B1F"/>
+          </a:solidFill>
+          <a:ln>
+            <a:noFill/>
+          </a:ln>
+        </p:spPr>
+        <p:style>
+          <a:lnRef idx="1">
+            <a:schemeClr val="accent1"/>
+          </a:lnRef>
+          <a:fillRef idx="3">
+            <a:schemeClr val="accent1"/>
+          </a:fillRef>
+          <a:effectRef idx="2">
+            <a:schemeClr val="accent1"/>
+          </a:effectRef>
+          <a:fontRef idx="minor">
+            <a:schemeClr val="lt1"/>
+          </a:fontRef>
+        </p:style>
+        <p:txBody>
+          <a:bodyPr rtlCol="0" anchor="ctr"/>
+          <a:lstStyle/>
+          <a:p>
+            <a:pPr algn="ctr"/>
+          </a:p>
+        </p:txBody>
+      </p:sp>
+      <p:sp>
+        <p:nvSpPr>
+          <p:cNvPr id="70" name="TextBox 69"/>
+          <p:cNvSpPr txBox="1"/>
+          <p:nvPr/>
+        </p:nvSpPr>
+        <p:spPr>
+          <a:xfrm>
+            <a:off x="8503920" y="5852160"/>
+            <a:ext cx="3383280" cy="274320"/>
+          </a:xfrm>
+          <a:prstGeom prst="rect">
+            <a:avLst/>
+          </a:prstGeom>
+          <a:noFill/>
+        </p:spPr>
+        <p:txBody>
+          <a:bodyPr wrap="square" lIns="0" rIns="0" tIns="0" bIns="0">
+            <a:spAutoFit/>
+          </a:bodyPr>
+          <a:lstStyle/>
+          <a:p>
+            <a:pPr algn="l">
+              <a:defRPr sz="800" b="1">
+                <a:solidFill>
+                  <a:srgbClr val="D48B1F"/>
+                </a:solidFill>
+                <a:latin typeface="Plus Jakarta Sans"/>
+              </a:defRPr>
+            </a:pPr>
+            <a:r>
+              <a:t>PRONTO QUANDO</a:t>
+            </a:r>
+          </a:p>
+        </p:txBody>
+      </p:sp>
+      <p:sp>
+        <p:nvSpPr>
+          <p:cNvPr id="71" name="TextBox 70"/>
+          <p:cNvSpPr txBox="1"/>
+          <p:nvPr/>
+        </p:nvSpPr>
+        <p:spPr>
+          <a:xfrm>
+            <a:off x="8503920" y="6035040"/>
+            <a:ext cx="3383280" cy="274320"/>
+          </a:xfrm>
+          <a:prstGeom prst="rect">
+            <a:avLst/>
+          </a:prstGeom>
+          <a:noFill/>
+        </p:spPr>
+        <p:txBody>
+          <a:bodyPr wrap="square" lIns="0" rIns="0" tIns="0" bIns="0">
+            <a:spAutoFit/>
+          </a:bodyPr>
+          <a:lstStyle/>
+          <a:p>
+            <a:pPr algn="l">
+              <a:defRPr sz="900" b="0">
+                <a:solidFill>
+                  <a:srgbClr val="4A4A4A"/>
+                </a:solidFill>
+                <a:latin typeface="IBM Plex Mono"/>
+              </a:defRPr>
+            </a:pPr>
+            <a:r>
+              <a:t>Voce defende cada paragrafo em 30s</a:t>
+            </a:r>
+          </a:p>
+        </p:txBody>
+      </p:sp>
+      <p:sp>
+        <p:nvSpPr>
+          <p:cNvPr id="72" name="TextBox 71"/>
+          <p:cNvSpPr txBox="1"/>
+          <p:nvPr/>
+        </p:nvSpPr>
+        <p:spPr>
+          <a:xfrm>
+            <a:off x="1097280" y="6446520"/>
+            <a:ext cx="7315200" cy="320040"/>
+          </a:xfrm>
+          <a:prstGeom prst="rect">
+            <a:avLst/>
+          </a:prstGeom>
+          <a:noFill/>
+        </p:spPr>
+        <p:txBody>
+          <a:bodyPr wrap="square" lIns="0" rIns="0" tIns="0" bIns="0">
+            <a:spAutoFit/>
+          </a:bodyPr>
+          <a:lstStyle/>
+          <a:p>
+            <a:pPr algn="l">
+              <a:defRPr sz="900" b="0">
+                <a:solidFill>
+                  <a:srgbClr val="666666"/>
+                </a:solidFill>
+                <a:latin typeface="Plus Jakarta Sans"/>
+              </a:defRPr>
+            </a:pPr>
+            <a:r>
+              <a:t>Manual de Uso  |  Agent Study Assistant  |  Verticalis AI Journey</a:t>
+            </a:r>
+          </a:p>
+        </p:txBody>
+      </p:sp>
+      <p:sp>
+        <p:nvSpPr>
+          <p:cNvPr id="73" name="TextBox 72"/>
+          <p:cNvSpPr txBox="1"/>
+          <p:nvPr/>
+        </p:nvSpPr>
+        <p:spPr>
+          <a:xfrm>
+            <a:off x="10058400" y="6446520"/>
+            <a:ext cx="1371600" cy="320040"/>
+          </a:xfrm>
+          <a:prstGeom prst="rect">
+            <a:avLst/>
+          </a:prstGeom>
+          <a:noFill/>
+        </p:spPr>
+        <p:txBody>
+          <a:bodyPr wrap="square" lIns="0" rIns="0" tIns="0" bIns="0">
+            <a:spAutoFit/>
+          </a:bodyPr>
+          <a:lstStyle/>
+          <a:p>
+            <a:pPr algn="r">
+              <a:defRPr sz="900" b="0">
+                <a:solidFill>
+                  <a:srgbClr val="666666"/>
+                </a:solidFill>
+                <a:latin typeface="IBM Plex Mono"/>
+              </a:defRPr>
+            </a:pPr>
+            <a:r>
+              <a:t>18 / 20</a:t>
+            </a:r>
+          </a:p>
+        </p:txBody>
+      </p:sp>
+    </p:spTree>
+  </p:cSld>
+  <p:clrMapOvr>
+    <a:masterClrMapping/>
+  </p:clrMapOvr>
+</p:sld>
+</file>
+
+<file path=ppt/slides/slide19.xml><?xml version="1.0" encoding="utf-8"?>
 <p:sld xmlns:a="http://schemas.openxmlformats.org/drawingml/2006/main" xmlns:p="http://schemas.openxmlformats.org/presentationml/2006/main" xmlns:r="http://schemas.openxmlformats.org/officeDocument/2006/relationships">
   <p:cSld>
     <p:bg>
@@ -16747,14 +19638,86 @@
       <p:grpSpPr/>
       <p:sp>
         <p:nvSpPr>
-          <p:cNvPr id="2" name="Rectangle 1"/>
+          <p:cNvPr id="2" name="TextBox 1"/>
+          <p:cNvSpPr txBox="1"/>
+          <p:nvPr/>
+        </p:nvSpPr>
+        <p:spPr>
+          <a:xfrm>
+            <a:off x="1097280" y="548640"/>
+            <a:ext cx="1828800" cy="320040"/>
+          </a:xfrm>
+          <a:prstGeom prst="rect">
+            <a:avLst/>
+          </a:prstGeom>
+          <a:noFill/>
+        </p:spPr>
+        <p:txBody>
+          <a:bodyPr wrap="square" lIns="0" rIns="0" tIns="0" bIns="0">
+            <a:spAutoFit/>
+          </a:bodyPr>
+          <a:lstStyle/>
+          <a:p>
+            <a:pPr algn="l">
+              <a:defRPr sz="1300" b="1">
+                <a:solidFill>
+                  <a:srgbClr val="D4C878"/>
+                </a:solidFill>
+                <a:latin typeface="IBM Plex Mono"/>
+              </a:defRPr>
+            </a:pPr>
+            <a:r>
+              <a:t>08</a:t>
+            </a:r>
+          </a:p>
+        </p:txBody>
+      </p:sp>
+      <p:sp>
+        <p:nvSpPr>
+          <p:cNvPr id="3" name="TextBox 2"/>
+          <p:cNvSpPr txBox="1"/>
+          <p:nvPr/>
+        </p:nvSpPr>
+        <p:spPr>
+          <a:xfrm>
+            <a:off x="1097280" y="960120"/>
+            <a:ext cx="10058400" cy="640080"/>
+          </a:xfrm>
+          <a:prstGeom prst="rect">
+            <a:avLst/>
+          </a:prstGeom>
+          <a:noFill/>
+        </p:spPr>
+        <p:txBody>
+          <a:bodyPr wrap="square" lIns="0" rIns="0" tIns="0" bIns="0">
+            <a:spAutoFit/>
+          </a:bodyPr>
+          <a:lstStyle/>
+          <a:p>
+            <a:pPr algn="l">
+              <a:defRPr sz="2800" b="1">
+                <a:solidFill>
+                  <a:srgbClr val="FFFFFF"/>
+                </a:solidFill>
+                <a:latin typeface="Plus Jakarta Sans"/>
+              </a:defRPr>
+            </a:pPr>
+            <a:r>
+              <a:t>Como saber se voce esta progredindo</a:t>
+            </a:r>
+          </a:p>
+        </p:txBody>
+      </p:sp>
+      <p:sp>
+        <p:nvSpPr>
+          <p:cNvPr id="4" name="Rectangle 3"/>
           <p:cNvSpPr/>
           <p:nvPr/>
         </p:nvSpPr>
         <p:spPr>
           <a:xfrm>
-            <a:off x="0" y="2377440"/>
-            <a:ext cx="12191695" cy="36576"/>
+            <a:off x="1097280" y="1600200"/>
+            <a:ext cx="1097280" cy="38100"/>
           </a:xfrm>
           <a:prstGeom prst="rect">
             <a:avLst/>
@@ -16790,13 +19753,13 @@
       </p:sp>
       <p:sp>
         <p:nvSpPr>
-          <p:cNvPr id="3" name="TextBox 2"/>
-          <p:cNvSpPr txBox="1"/>
-          <p:nvPr/>
-        </p:nvSpPr>
-        <p:spPr>
-          <a:xfrm>
-            <a:off x="1097280" y="914400"/>
+          <p:cNvPr id="5" name="TextBox 4"/>
+          <p:cNvSpPr txBox="1"/>
+          <p:nvPr/>
+        </p:nvSpPr>
+        <p:spPr>
+          <a:xfrm>
+            <a:off x="1097280" y="1783080"/>
             <a:ext cx="10058400" cy="365760"/>
           </a:xfrm>
           <a:prstGeom prst="rect">
@@ -16811,87 +19774,15 @@
           <a:lstStyle/>
           <a:p>
             <a:pPr algn="l">
-              <a:defRPr sz="1200" b="1">
-                <a:solidFill>
-                  <a:srgbClr val="D4C878"/>
+              <a:defRPr sz="1300" b="0">
+                <a:solidFill>
+                  <a:srgbClr val="AAAAAA"/>
                 </a:solidFill>
                 <a:latin typeface="Plus Jakarta Sans"/>
               </a:defRPr>
             </a:pPr>
             <a:r>
-              <a:t>PROXIMOS 3 PASSOS HOJE</a:t>
-            </a:r>
-          </a:p>
-        </p:txBody>
-      </p:sp>
-      <p:sp>
-        <p:nvSpPr>
-          <p:cNvPr id="4" name="TextBox 3"/>
-          <p:cNvSpPr txBox="1"/>
-          <p:nvPr/>
-        </p:nvSpPr>
-        <p:spPr>
-          <a:xfrm>
-            <a:off x="1097280" y="1280160"/>
-            <a:ext cx="10058400" cy="822960"/>
-          </a:xfrm>
-          <a:prstGeom prst="rect">
-            <a:avLst/>
-          </a:prstGeom>
-          <a:noFill/>
-        </p:spPr>
-        <p:txBody>
-          <a:bodyPr wrap="square" lIns="0" rIns="0" tIns="0" bIns="0">
-            <a:spAutoFit/>
-          </a:bodyPr>
-          <a:lstStyle/>
-          <a:p>
-            <a:pPr algn="l">
-              <a:defRPr sz="3800" b="1">
-                <a:solidFill>
-                  <a:srgbClr val="FFFFFF"/>
-                </a:solidFill>
-                <a:latin typeface="Lora"/>
-              </a:defRPr>
-            </a:pPr>
-            <a:r>
-              <a:t>Comece pelo fundamento.</a:t>
-            </a:r>
-          </a:p>
-        </p:txBody>
-      </p:sp>
-      <p:sp>
-        <p:nvSpPr>
-          <p:cNvPr id="5" name="TextBox 4"/>
-          <p:cNvSpPr txBox="1"/>
-          <p:nvPr/>
-        </p:nvSpPr>
-        <p:spPr>
-          <a:xfrm>
-            <a:off x="1097280" y="1965960"/>
-            <a:ext cx="10058400" cy="320040"/>
-          </a:xfrm>
-          <a:prstGeom prst="rect">
-            <a:avLst/>
-          </a:prstGeom>
-          <a:noFill/>
-        </p:spPr>
-        <p:txBody>
-          <a:bodyPr wrap="square" lIns="0" rIns="0" tIns="0" bIns="0">
-            <a:spAutoFit/>
-          </a:bodyPr>
-          <a:lstStyle/>
-          <a:p>
-            <a:pPr algn="l">
-              <a:defRPr sz="1600" b="0">
-                <a:solidFill>
-                  <a:srgbClr val="D4C878"/>
-                </a:solidFill>
-                <a:latin typeface="Lora"/>
-              </a:defRPr>
-            </a:pPr>
-            <a:r>
-              <a:t>Tres acoes em ordem para destravar todo o resto.</a:t>
+              <a:t>Marcos de check-in pessoal + armadilhas comuns das primeiras 2 semanas.</a:t>
             </a:r>
           </a:p>
         </p:txBody>
@@ -16904,8 +19795,286 @@
         </p:nvSpPr>
         <p:spPr>
           <a:xfrm>
-            <a:off x="1097280" y="2743200"/>
-            <a:ext cx="640080" cy="640080"/>
+            <a:off x="640080" y="2331720"/>
+            <a:ext cx="5486400" cy="4023360"/>
+          </a:xfrm>
+          <a:prstGeom prst="roundRect">
+            <a:avLst/>
+          </a:prstGeom>
+          <a:solidFill>
+            <a:srgbClr val="2D453E"/>
+          </a:solidFill>
+          <a:ln w="6350">
+            <a:solidFill>
+              <a:srgbClr val="C5B358"/>
+            </a:solidFill>
+          </a:ln>
+        </p:spPr>
+        <p:style>
+          <a:lnRef idx="1">
+            <a:schemeClr val="accent1"/>
+          </a:lnRef>
+          <a:fillRef idx="3">
+            <a:schemeClr val="accent1"/>
+          </a:fillRef>
+          <a:effectRef idx="2">
+            <a:schemeClr val="accent1"/>
+          </a:effectRef>
+          <a:fontRef idx="minor">
+            <a:schemeClr val="lt1"/>
+          </a:fontRef>
+        </p:style>
+        <p:txBody>
+          <a:bodyPr rtlCol="0" anchor="ctr"/>
+          <a:lstStyle/>
+          <a:p>
+            <a:pPr algn="ctr"/>
+          </a:p>
+        </p:txBody>
+      </p:sp>
+      <p:sp>
+        <p:nvSpPr>
+          <p:cNvPr id="7" name="TextBox 6"/>
+          <p:cNvSpPr txBox="1"/>
+          <p:nvPr/>
+        </p:nvSpPr>
+        <p:spPr>
+          <a:xfrm>
+            <a:off x="822960" y="2468880"/>
+            <a:ext cx="5212080" cy="320040"/>
+          </a:xfrm>
+          <a:prstGeom prst="rect">
+            <a:avLst/>
+          </a:prstGeom>
+          <a:noFill/>
+        </p:spPr>
+        <p:txBody>
+          <a:bodyPr wrap="square" lIns="0" rIns="0" tIns="0" bIns="0">
+            <a:spAutoFit/>
+          </a:bodyPr>
+          <a:lstStyle/>
+          <a:p>
+            <a:pPr algn="l">
+              <a:defRPr sz="1200" b="1">
+                <a:solidFill>
+                  <a:srgbClr val="C5B358"/>
+                </a:solidFill>
+                <a:latin typeface="Plus Jakarta Sans"/>
+              </a:defRPr>
+            </a:pPr>
+            <a:r>
+              <a:t>✓ MARCOS DE PROGRESSO</a:t>
+            </a:r>
+          </a:p>
+        </p:txBody>
+      </p:sp>
+      <p:sp>
+        <p:nvSpPr>
+          <p:cNvPr id="8" name="TextBox 7"/>
+          <p:cNvSpPr txBox="1"/>
+          <p:nvPr/>
+        </p:nvSpPr>
+        <p:spPr>
+          <a:xfrm>
+            <a:off x="822960" y="2743200"/>
+            <a:ext cx="5212080" cy="274320"/>
+          </a:xfrm>
+          <a:prstGeom prst="rect">
+            <a:avLst/>
+          </a:prstGeom>
+          <a:noFill/>
+        </p:spPr>
+        <p:txBody>
+          <a:bodyPr wrap="square" lIns="0" rIns="0" tIns="0" bIns="0">
+            <a:spAutoFit/>
+          </a:bodyPr>
+          <a:lstStyle/>
+          <a:p>
+            <a:pPr algn="l">
+              <a:defRPr sz="1000" b="0">
+                <a:solidFill>
+                  <a:srgbClr val="AAAAAA"/>
+                </a:solidFill>
+                <a:latin typeface="Plus Jakarta Sans"/>
+              </a:defRPr>
+            </a:pPr>
+            <a:r>
+              <a:t>Use como check-in pessoal</a:t>
+            </a:r>
+          </a:p>
+        </p:txBody>
+      </p:sp>
+      <p:sp>
+        <p:nvSpPr>
+          <p:cNvPr id="9" name="Rounded Rectangle 8"/>
+          <p:cNvSpPr/>
+          <p:nvPr/>
+        </p:nvSpPr>
+        <p:spPr>
+          <a:xfrm>
+            <a:off x="822960" y="3200400"/>
+            <a:ext cx="594360" cy="411480"/>
+          </a:xfrm>
+          <a:prstGeom prst="roundRect">
+            <a:avLst/>
+          </a:prstGeom>
+          <a:solidFill>
+            <a:srgbClr val="2D6E43"/>
+          </a:solidFill>
+          <a:ln>
+            <a:noFill/>
+          </a:ln>
+        </p:spPr>
+        <p:style>
+          <a:lnRef idx="1">
+            <a:schemeClr val="accent1"/>
+          </a:lnRef>
+          <a:fillRef idx="3">
+            <a:schemeClr val="accent1"/>
+          </a:fillRef>
+          <a:effectRef idx="2">
+            <a:schemeClr val="accent1"/>
+          </a:effectRef>
+          <a:fontRef idx="minor">
+            <a:schemeClr val="lt1"/>
+          </a:fontRef>
+        </p:style>
+        <p:txBody>
+          <a:bodyPr rtlCol="0" anchor="ctr"/>
+          <a:lstStyle/>
+          <a:p>
+            <a:pPr algn="ctr"/>
+          </a:p>
+        </p:txBody>
+      </p:sp>
+      <p:sp>
+        <p:nvSpPr>
+          <p:cNvPr id="10" name="TextBox 9"/>
+          <p:cNvSpPr txBox="1"/>
+          <p:nvPr/>
+        </p:nvSpPr>
+        <p:spPr>
+          <a:xfrm>
+            <a:off x="822960" y="3273552"/>
+            <a:ext cx="594360" cy="274320"/>
+          </a:xfrm>
+          <a:prstGeom prst="rect">
+            <a:avLst/>
+          </a:prstGeom>
+          <a:noFill/>
+        </p:spPr>
+        <p:txBody>
+          <a:bodyPr wrap="square" lIns="0" rIns="0" tIns="0" bIns="0">
+            <a:spAutoFit/>
+          </a:bodyPr>
+          <a:lstStyle/>
+          <a:p>
+            <a:pPr algn="ctr">
+              <a:defRPr sz="1100" b="1">
+                <a:solidFill>
+                  <a:srgbClr val="0B2823"/>
+                </a:solidFill>
+                <a:latin typeface="IBM Plex Mono"/>
+              </a:defRPr>
+            </a:pPr>
+            <a:r>
+              <a:t>D1</a:t>
+            </a:r>
+          </a:p>
+        </p:txBody>
+      </p:sp>
+      <p:sp>
+        <p:nvSpPr>
+          <p:cNvPr id="11" name="Rectangle 10"/>
+          <p:cNvSpPr/>
+          <p:nvPr/>
+        </p:nvSpPr>
+        <p:spPr>
+          <a:xfrm>
+            <a:off x="1097280" y="3611880"/>
+            <a:ext cx="25400" cy="182880"/>
+          </a:xfrm>
+          <a:prstGeom prst="rect">
+            <a:avLst/>
+          </a:prstGeom>
+          <a:solidFill>
+            <a:srgbClr val="4A4A4A"/>
+          </a:solidFill>
+          <a:ln>
+            <a:noFill/>
+          </a:ln>
+        </p:spPr>
+        <p:style>
+          <a:lnRef idx="1">
+            <a:schemeClr val="accent1"/>
+          </a:lnRef>
+          <a:fillRef idx="3">
+            <a:schemeClr val="accent1"/>
+          </a:fillRef>
+          <a:effectRef idx="2">
+            <a:schemeClr val="accent1"/>
+          </a:effectRef>
+          <a:fontRef idx="minor">
+            <a:schemeClr val="lt1"/>
+          </a:fontRef>
+        </p:style>
+        <p:txBody>
+          <a:bodyPr rtlCol="0" anchor="ctr"/>
+          <a:lstStyle/>
+          <a:p>
+            <a:pPr algn="ctr"/>
+          </a:p>
+        </p:txBody>
+      </p:sp>
+      <p:sp>
+        <p:nvSpPr>
+          <p:cNvPr id="12" name="TextBox 11"/>
+          <p:cNvSpPr txBox="1"/>
+          <p:nvPr/>
+        </p:nvSpPr>
+        <p:spPr>
+          <a:xfrm>
+            <a:off x="1554480" y="3264408"/>
+            <a:ext cx="4480560" cy="365760"/>
+          </a:xfrm>
+          <a:prstGeom prst="rect">
+            <a:avLst/>
+          </a:prstGeom>
+          <a:noFill/>
+        </p:spPr>
+        <p:txBody>
+          <a:bodyPr wrap="square" lIns="0" rIns="0" tIns="0" bIns="0">
+            <a:spAutoFit/>
+          </a:bodyPr>
+          <a:lstStyle/>
+          <a:p>
+            <a:pPr algn="l">
+              <a:lnSpc>
+                <a:spcPts val="1400"/>
+              </a:lnSpc>
+              <a:defRPr sz="1100" b="0">
+                <a:solidFill>
+                  <a:srgbClr val="FFFFFF"/>
+                </a:solidFill>
+                <a:latin typeface="Plus Jakarta Sans"/>
+              </a:defRPr>
+            </a:pPr>
+            <a:r>
+              <a:t>Instalacao validada + voz calibrada</a:t>
+            </a:r>
+          </a:p>
+        </p:txBody>
+      </p:sp>
+      <p:sp>
+        <p:nvSpPr>
+          <p:cNvPr id="13" name="Rounded Rectangle 12"/>
+          <p:cNvSpPr/>
+          <p:nvPr/>
+        </p:nvSpPr>
+        <p:spPr>
+          <a:xfrm>
+            <a:off x="822960" y="3794760"/>
+            <a:ext cx="594360" cy="411480"/>
           </a:xfrm>
           <a:prstGeom prst="roundRect">
             <a:avLst/>
@@ -16941,14 +20110,14 @@
       </p:sp>
       <p:sp>
         <p:nvSpPr>
-          <p:cNvPr id="7" name="TextBox 6"/>
-          <p:cNvSpPr txBox="1"/>
-          <p:nvPr/>
-        </p:nvSpPr>
-        <p:spPr>
-          <a:xfrm>
-            <a:off x="1097280" y="2907792"/>
-            <a:ext cx="640080" cy="365760"/>
+          <p:cNvPr id="14" name="TextBox 13"/>
+          <p:cNvSpPr txBox="1"/>
+          <p:nvPr/>
+        </p:nvSpPr>
+        <p:spPr>
+          <a:xfrm>
+            <a:off x="822960" y="3867912"/>
+            <a:ext cx="594360" cy="274320"/>
           </a:xfrm>
           <a:prstGeom prst="rect">
             <a:avLst/>
@@ -16962,7 +20131,7 @@
           <a:lstStyle/>
           <a:p>
             <a:pPr algn="ctr">
-              <a:defRPr sz="1600" b="1">
+              <a:defRPr sz="1100" b="1">
                 <a:solidFill>
                   <a:srgbClr val="0B2823"/>
                 </a:solidFill>
@@ -16970,57 +20139,64 @@
               </a:defRPr>
             </a:pPr>
             <a:r>
-              <a:t>01</a:t>
-            </a:r>
-          </a:p>
-        </p:txBody>
-      </p:sp>
-      <p:sp>
-        <p:nvSpPr>
-          <p:cNvPr id="8" name="TextBox 7"/>
-          <p:cNvSpPr txBox="1"/>
-          <p:nvPr/>
-        </p:nvSpPr>
-        <p:spPr>
-          <a:xfrm>
-            <a:off x="1920240" y="2834640"/>
-            <a:ext cx="10058400" cy="365760"/>
-          </a:xfrm>
-          <a:prstGeom prst="rect">
-            <a:avLst/>
-          </a:prstGeom>
-          <a:noFill/>
-        </p:spPr>
-        <p:txBody>
-          <a:bodyPr wrap="square" lIns="0" rIns="0" tIns="0" bIns="0">
-            <a:spAutoFit/>
-          </a:bodyPr>
-          <a:lstStyle/>
-          <a:p>
-            <a:pPr algn="l">
-              <a:defRPr sz="1600" b="1">
-                <a:solidFill>
-                  <a:srgbClr val="FFFFFF"/>
-                </a:solidFill>
-                <a:latin typeface="Plus Jakarta Sans"/>
-              </a:defRPr>
-            </a:pPr>
-            <a:r>
-              <a:t>Aplique o questionario do voice-humanizer</a:t>
-            </a:r>
-          </a:p>
-        </p:txBody>
-      </p:sp>
-      <p:sp>
-        <p:nvSpPr>
-          <p:cNvPr id="9" name="TextBox 8"/>
-          <p:cNvSpPr txBox="1"/>
-          <p:nvPr/>
-        </p:nvSpPr>
-        <p:spPr>
-          <a:xfrm>
-            <a:off x="1920240" y="3154680"/>
-            <a:ext cx="9601200" cy="457200"/>
+              <a:t>D3</a:t>
+            </a:r>
+          </a:p>
+        </p:txBody>
+      </p:sp>
+      <p:sp>
+        <p:nvSpPr>
+          <p:cNvPr id="15" name="Rectangle 14"/>
+          <p:cNvSpPr/>
+          <p:nvPr/>
+        </p:nvSpPr>
+        <p:spPr>
+          <a:xfrm>
+            <a:off x="1097280" y="4206240"/>
+            <a:ext cx="25400" cy="182880"/>
+          </a:xfrm>
+          <a:prstGeom prst="rect">
+            <a:avLst/>
+          </a:prstGeom>
+          <a:solidFill>
+            <a:srgbClr val="4A4A4A"/>
+          </a:solidFill>
+          <a:ln>
+            <a:noFill/>
+          </a:ln>
+        </p:spPr>
+        <p:style>
+          <a:lnRef idx="1">
+            <a:schemeClr val="accent1"/>
+          </a:lnRef>
+          <a:fillRef idx="3">
+            <a:schemeClr val="accent1"/>
+          </a:fillRef>
+          <a:effectRef idx="2">
+            <a:schemeClr val="accent1"/>
+          </a:effectRef>
+          <a:fontRef idx="minor">
+            <a:schemeClr val="lt1"/>
+          </a:fontRef>
+        </p:style>
+        <p:txBody>
+          <a:bodyPr rtlCol="0" anchor="ctr"/>
+          <a:lstStyle/>
+          <a:p>
+            <a:pPr algn="ctr"/>
+          </a:p>
+        </p:txBody>
+      </p:sp>
+      <p:sp>
+        <p:nvSpPr>
+          <p:cNvPr id="16" name="TextBox 15"/>
+          <p:cNvSpPr txBox="1"/>
+          <p:nvPr/>
+        </p:nvSpPr>
+        <p:spPr>
+          <a:xfrm>
+            <a:off x="1554480" y="3858768"/>
+            <a:ext cx="4480560" cy="365760"/>
           </a:xfrm>
           <a:prstGeom prst="rect">
             <a:avLst/>
@@ -17039,31 +20215,27 @@
               </a:lnSpc>
               <a:defRPr sz="1100" b="0">
                 <a:solidFill>
-                  <a:srgbClr val="CCCCCC"/>
+                  <a:srgbClr val="FFFFFF"/>
                 </a:solidFill>
                 <a:latin typeface="Plus Jakarta Sans"/>
               </a:defRPr>
             </a:pPr>
             <a:r>
-              <a:t>30 minutos. Sem isso, todo polimento opera no escuro.</a:t>
-            </a:r>
-            <a:br/>
-            <a:r>
-              <a:t>Cole no Claude Code: 'Acione voice-humanizer para aplicar o questionario inicial'</a:t>
-            </a:r>
-          </a:p>
-        </p:txBody>
-      </p:sp>
-      <p:sp>
-        <p:nvSpPr>
-          <p:cNvPr id="10" name="Rounded Rectangle 9"/>
+              <a:t>Primeiro ciclo CODE em fontes reais</a:t>
+            </a:r>
+          </a:p>
+        </p:txBody>
+      </p:sp>
+      <p:sp>
+        <p:nvSpPr>
+          <p:cNvPr id="17" name="Rounded Rectangle 16"/>
           <p:cNvSpPr/>
           <p:nvPr/>
         </p:nvSpPr>
         <p:spPr>
           <a:xfrm>
-            <a:off x="1097280" y="3657600"/>
-            <a:ext cx="640080" cy="640080"/>
+            <a:off x="822960" y="4389120"/>
+            <a:ext cx="594360" cy="411480"/>
           </a:xfrm>
           <a:prstGeom prst="roundRect">
             <a:avLst/>
@@ -17099,14 +20271,14 @@
       </p:sp>
       <p:sp>
         <p:nvSpPr>
-          <p:cNvPr id="11" name="TextBox 10"/>
-          <p:cNvSpPr txBox="1"/>
-          <p:nvPr/>
-        </p:nvSpPr>
-        <p:spPr>
-          <a:xfrm>
-            <a:off x="1097280" y="3822192"/>
-            <a:ext cx="640080" cy="365760"/>
+          <p:cNvPr id="18" name="TextBox 17"/>
+          <p:cNvSpPr txBox="1"/>
+          <p:nvPr/>
+        </p:nvSpPr>
+        <p:spPr>
+          <a:xfrm>
+            <a:off x="822960" y="4462272"/>
+            <a:ext cx="594360" cy="274320"/>
           </a:xfrm>
           <a:prstGeom prst="rect">
             <a:avLst/>
@@ -17120,7 +20292,7 @@
           <a:lstStyle/>
           <a:p>
             <a:pPr algn="ctr">
-              <a:defRPr sz="1600" b="1">
+              <a:defRPr sz="1100" b="1">
                 <a:solidFill>
                   <a:srgbClr val="0B2823"/>
                 </a:solidFill>
@@ -17128,57 +20300,64 @@
               </a:defRPr>
             </a:pPr>
             <a:r>
-              <a:t>02</a:t>
-            </a:r>
-          </a:p>
-        </p:txBody>
-      </p:sp>
-      <p:sp>
-        <p:nvSpPr>
-          <p:cNvPr id="12" name="TextBox 11"/>
-          <p:cNvSpPr txBox="1"/>
-          <p:nvPr/>
-        </p:nvSpPr>
-        <p:spPr>
-          <a:xfrm>
-            <a:off x="1920240" y="3749040"/>
-            <a:ext cx="10058400" cy="365760"/>
-          </a:xfrm>
-          <a:prstGeom prst="rect">
-            <a:avLst/>
-          </a:prstGeom>
-          <a:noFill/>
-        </p:spPr>
-        <p:txBody>
-          <a:bodyPr wrap="square" lIns="0" rIns="0" tIns="0" bIns="0">
-            <a:spAutoFit/>
-          </a:bodyPr>
-          <a:lstStyle/>
-          <a:p>
-            <a:pPr algn="l">
-              <a:defRPr sz="1600" b="1">
-                <a:solidFill>
-                  <a:srgbClr val="FFFFFF"/>
-                </a:solidFill>
-                <a:latin typeface="Plus Jakarta Sans"/>
-              </a:defRPr>
-            </a:pPr>
-            <a:r>
-              <a:t>Defina sua pergunta de pesquisa em memory/project_thesis.md</a:t>
-            </a:r>
-          </a:p>
-        </p:txBody>
-      </p:sp>
-      <p:sp>
-        <p:nvSpPr>
-          <p:cNvPr id="13" name="TextBox 12"/>
-          <p:cNvSpPr txBox="1"/>
-          <p:nvPr/>
-        </p:nvSpPr>
-        <p:spPr>
-          <a:xfrm>
-            <a:off x="1920240" y="4069080"/>
-            <a:ext cx="9601200" cy="457200"/>
+              <a:t>D7</a:t>
+            </a:r>
+          </a:p>
+        </p:txBody>
+      </p:sp>
+      <p:sp>
+        <p:nvSpPr>
+          <p:cNvPr id="19" name="Rectangle 18"/>
+          <p:cNvSpPr/>
+          <p:nvPr/>
+        </p:nvSpPr>
+        <p:spPr>
+          <a:xfrm>
+            <a:off x="1097280" y="4800600"/>
+            <a:ext cx="25400" cy="182880"/>
+          </a:xfrm>
+          <a:prstGeom prst="rect">
+            <a:avLst/>
+          </a:prstGeom>
+          <a:solidFill>
+            <a:srgbClr val="4A4A4A"/>
+          </a:solidFill>
+          <a:ln>
+            <a:noFill/>
+          </a:ln>
+        </p:spPr>
+        <p:style>
+          <a:lnRef idx="1">
+            <a:schemeClr val="accent1"/>
+          </a:lnRef>
+          <a:fillRef idx="3">
+            <a:schemeClr val="accent1"/>
+          </a:fillRef>
+          <a:effectRef idx="2">
+            <a:schemeClr val="accent1"/>
+          </a:effectRef>
+          <a:fontRef idx="minor">
+            <a:schemeClr val="lt1"/>
+          </a:fontRef>
+        </p:style>
+        <p:txBody>
+          <a:bodyPr rtlCol="0" anchor="ctr"/>
+          <a:lstStyle/>
+          <a:p>
+            <a:pPr algn="ctr"/>
+          </a:p>
+        </p:txBody>
+      </p:sp>
+      <p:sp>
+        <p:nvSpPr>
+          <p:cNvPr id="20" name="TextBox 19"/>
+          <p:cNvSpPr txBox="1"/>
+          <p:nvPr/>
+        </p:nvSpPr>
+        <p:spPr>
+          <a:xfrm>
+            <a:off x="1554480" y="4453128"/>
+            <a:ext cx="4480560" cy="365760"/>
           </a:xfrm>
           <a:prstGeom prst="rect">
             <a:avLst/>
@@ -17197,27 +20376,27 @@
               </a:lnSpc>
               <a:defRPr sz="1100" b="0">
                 <a:solidFill>
-                  <a:srgbClr val="CCCCCC"/>
+                  <a:srgbClr val="FFFFFF"/>
                 </a:solidFill>
                 <a:latin typeface="Plus Jakarta Sans"/>
               </a:defRPr>
             </a:pPr>
             <a:r>
-              <a:t>Uma frase clara. Se ainda nao tem, acione methodology-advisor para te ajudar a formular.</a:t>
-            </a:r>
-          </a:p>
-        </p:txBody>
-      </p:sp>
-      <p:sp>
-        <p:nvSpPr>
-          <p:cNvPr id="14" name="Rounded Rectangle 13"/>
+              <a:t>Primeira mini-secao (1500 palavras) auditada e humanizada</a:t>
+            </a:r>
+          </a:p>
+        </p:txBody>
+      </p:sp>
+      <p:sp>
+        <p:nvSpPr>
+          <p:cNvPr id="21" name="Rounded Rectangle 20"/>
           <p:cNvSpPr/>
           <p:nvPr/>
         </p:nvSpPr>
         <p:spPr>
           <a:xfrm>
-            <a:off x="1097280" y="4572000"/>
-            <a:ext cx="640080" cy="640080"/>
+            <a:off x="822960" y="4983480"/>
+            <a:ext cx="594360" cy="411480"/>
           </a:xfrm>
           <a:prstGeom prst="roundRect">
             <a:avLst/>
@@ -17253,14 +20432,14 @@
       </p:sp>
       <p:sp>
         <p:nvSpPr>
-          <p:cNvPr id="15" name="TextBox 14"/>
-          <p:cNvSpPr txBox="1"/>
-          <p:nvPr/>
-        </p:nvSpPr>
-        <p:spPr>
-          <a:xfrm>
-            <a:off x="1097280" y="4736592"/>
-            <a:ext cx="640080" cy="365760"/>
+          <p:cNvPr id="22" name="TextBox 21"/>
+          <p:cNvSpPr txBox="1"/>
+          <p:nvPr/>
+        </p:nvSpPr>
+        <p:spPr>
+          <a:xfrm>
+            <a:off x="822960" y="5056632"/>
+            <a:ext cx="594360" cy="274320"/>
           </a:xfrm>
           <a:prstGeom prst="rect">
             <a:avLst/>
@@ -17274,7 +20453,7 @@
           <a:lstStyle/>
           <a:p>
             <a:pPr algn="ctr">
-              <a:defRPr sz="1600" b="1">
+              <a:defRPr sz="1100" b="1">
                 <a:solidFill>
                   <a:srgbClr val="0B2823"/>
                 </a:solidFill>
@@ -17282,57 +20461,64 @@
               </a:defRPr>
             </a:pPr>
             <a:r>
-              <a:t>03</a:t>
-            </a:r>
-          </a:p>
-        </p:txBody>
-      </p:sp>
-      <p:sp>
-        <p:nvSpPr>
-          <p:cNvPr id="16" name="TextBox 15"/>
-          <p:cNvSpPr txBox="1"/>
-          <p:nvPr/>
-        </p:nvSpPr>
-        <p:spPr>
-          <a:xfrm>
-            <a:off x="1920240" y="4663440"/>
-            <a:ext cx="10058400" cy="365760"/>
-          </a:xfrm>
-          <a:prstGeom prst="rect">
-            <a:avLst/>
-          </a:prstGeom>
-          <a:noFill/>
-        </p:spPr>
-        <p:txBody>
-          <a:bodyPr wrap="square" lIns="0" rIns="0" tIns="0" bIns="0">
-            <a:spAutoFit/>
-          </a:bodyPr>
-          <a:lstStyle/>
-          <a:p>
-            <a:pPr algn="l">
-              <a:defRPr sz="1600" b="1">
-                <a:solidFill>
-                  <a:srgbClr val="FFFFFF"/>
-                </a:solidFill>
-                <a:latin typeface="Plus Jakarta Sans"/>
-              </a:defRPr>
-            </a:pPr>
-            <a:r>
-              <a:t>Capture suas primeiras 5 fontes</a:t>
-            </a:r>
-          </a:p>
-        </p:txBody>
-      </p:sp>
-      <p:sp>
-        <p:nvSpPr>
-          <p:cNvPr id="17" name="TextBox 16"/>
-          <p:cNvSpPr txBox="1"/>
-          <p:nvPr/>
-        </p:nvSpPr>
-        <p:spPr>
-          <a:xfrm>
-            <a:off x="1920240" y="4983480"/>
-            <a:ext cx="9601200" cy="457200"/>
+              <a:t>D14</a:t>
+            </a:r>
+          </a:p>
+        </p:txBody>
+      </p:sp>
+      <p:sp>
+        <p:nvSpPr>
+          <p:cNvPr id="23" name="Rectangle 22"/>
+          <p:cNvSpPr/>
+          <p:nvPr/>
+        </p:nvSpPr>
+        <p:spPr>
+          <a:xfrm>
+            <a:off x="1097280" y="5394960"/>
+            <a:ext cx="25400" cy="182880"/>
+          </a:xfrm>
+          <a:prstGeom prst="rect">
+            <a:avLst/>
+          </a:prstGeom>
+          <a:solidFill>
+            <a:srgbClr val="4A4A4A"/>
+          </a:solidFill>
+          <a:ln>
+            <a:noFill/>
+          </a:ln>
+        </p:spPr>
+        <p:style>
+          <a:lnRef idx="1">
+            <a:schemeClr val="accent1"/>
+          </a:lnRef>
+          <a:fillRef idx="3">
+            <a:schemeClr val="accent1"/>
+          </a:fillRef>
+          <a:effectRef idx="2">
+            <a:schemeClr val="accent1"/>
+          </a:effectRef>
+          <a:fontRef idx="minor">
+            <a:schemeClr val="lt1"/>
+          </a:fontRef>
+        </p:style>
+        <p:txBody>
+          <a:bodyPr rtlCol="0" anchor="ctr"/>
+          <a:lstStyle/>
+          <a:p>
+            <a:pPr algn="ctr"/>
+          </a:p>
+        </p:txBody>
+      </p:sp>
+      <p:sp>
+        <p:nvSpPr>
+          <p:cNvPr id="24" name="TextBox 23"/>
+          <p:cNvSpPr txBox="1"/>
+          <p:nvPr/>
+        </p:nvSpPr>
+        <p:spPr>
+          <a:xfrm>
+            <a:off x="1554480" y="5047488"/>
+            <a:ext cx="4480560" cy="365760"/>
           </a:xfrm>
           <a:prstGeom prst="rect">
             <a:avLst/>
@@ -17351,31 +20537,226 @@
               </a:lnSpc>
               <a:defRPr sz="1100" b="0">
                 <a:solidFill>
-                  <a:srgbClr val="CCCCCC"/>
+                  <a:srgbClr val="FFFFFF"/>
                 </a:solidFill>
                 <a:latin typeface="Plus Jakarta Sans"/>
               </a:defRPr>
             </a:pPr>
             <a:r>
-              <a:t>academic-researcher busca, source-validator audita, knowledge-architect ficha.</a:t>
-            </a:r>
-            <a:br/>
-            <a:r>
-              <a:t>Teste o ciclo end-to-end com fontes reais do seu tema.</a:t>
-            </a:r>
-          </a:p>
-        </p:txBody>
-      </p:sp>
-      <p:sp>
-        <p:nvSpPr>
-          <p:cNvPr id="18" name="TextBox 17"/>
-          <p:cNvSpPr txBox="1"/>
-          <p:nvPr/>
-        </p:nvSpPr>
-        <p:spPr>
-          <a:xfrm>
-            <a:off x="1097280" y="6263640"/>
-            <a:ext cx="10058400" cy="274320"/>
+              <a:t>20+ notas atomicas no Zettelkasten + 1 MOC criado</a:t>
+            </a:r>
+          </a:p>
+        </p:txBody>
+      </p:sp>
+      <p:sp>
+        <p:nvSpPr>
+          <p:cNvPr id="25" name="Rounded Rectangle 24"/>
+          <p:cNvSpPr/>
+          <p:nvPr/>
+        </p:nvSpPr>
+        <p:spPr>
+          <a:xfrm>
+            <a:off x="822960" y="5577840"/>
+            <a:ext cx="594360" cy="411480"/>
+          </a:xfrm>
+          <a:prstGeom prst="roundRect">
+            <a:avLst/>
+          </a:prstGeom>
+          <a:solidFill>
+            <a:srgbClr val="C5B358"/>
+          </a:solidFill>
+          <a:ln>
+            <a:noFill/>
+          </a:ln>
+        </p:spPr>
+        <p:style>
+          <a:lnRef idx="1">
+            <a:schemeClr val="accent1"/>
+          </a:lnRef>
+          <a:fillRef idx="3">
+            <a:schemeClr val="accent1"/>
+          </a:fillRef>
+          <a:effectRef idx="2">
+            <a:schemeClr val="accent1"/>
+          </a:effectRef>
+          <a:fontRef idx="minor">
+            <a:schemeClr val="lt1"/>
+          </a:fontRef>
+        </p:style>
+        <p:txBody>
+          <a:bodyPr rtlCol="0" anchor="ctr"/>
+          <a:lstStyle/>
+          <a:p>
+            <a:pPr algn="ctr"/>
+          </a:p>
+        </p:txBody>
+      </p:sp>
+      <p:sp>
+        <p:nvSpPr>
+          <p:cNvPr id="26" name="TextBox 25"/>
+          <p:cNvSpPr txBox="1"/>
+          <p:nvPr/>
+        </p:nvSpPr>
+        <p:spPr>
+          <a:xfrm>
+            <a:off x="822960" y="5650992"/>
+            <a:ext cx="594360" cy="274320"/>
+          </a:xfrm>
+          <a:prstGeom prst="rect">
+            <a:avLst/>
+          </a:prstGeom>
+          <a:noFill/>
+        </p:spPr>
+        <p:txBody>
+          <a:bodyPr wrap="square" lIns="0" rIns="0" tIns="0" bIns="0">
+            <a:spAutoFit/>
+          </a:bodyPr>
+          <a:lstStyle/>
+          <a:p>
+            <a:pPr algn="ctr">
+              <a:defRPr sz="1100" b="1">
+                <a:solidFill>
+                  <a:srgbClr val="0B2823"/>
+                </a:solidFill>
+                <a:latin typeface="IBM Plex Mono"/>
+              </a:defRPr>
+            </a:pPr>
+            <a:r>
+              <a:t>D30</a:t>
+            </a:r>
+          </a:p>
+        </p:txBody>
+      </p:sp>
+      <p:sp>
+        <p:nvSpPr>
+          <p:cNvPr id="27" name="TextBox 26"/>
+          <p:cNvSpPr txBox="1"/>
+          <p:nvPr/>
+        </p:nvSpPr>
+        <p:spPr>
+          <a:xfrm>
+            <a:off x="1554480" y="5641848"/>
+            <a:ext cx="4480560" cy="365760"/>
+          </a:xfrm>
+          <a:prstGeom prst="rect">
+            <a:avLst/>
+          </a:prstGeom>
+          <a:noFill/>
+        </p:spPr>
+        <p:txBody>
+          <a:bodyPr wrap="square" lIns="0" rIns="0" tIns="0" bIns="0">
+            <a:spAutoFit/>
+          </a:bodyPr>
+          <a:lstStyle/>
+          <a:p>
+            <a:pPr algn="l">
+              <a:lnSpc>
+                <a:spcPts val="1400"/>
+              </a:lnSpc>
+              <a:defRPr sz="1100" b="0">
+                <a:solidFill>
+                  <a:srgbClr val="FFFFFF"/>
+                </a:solidFill>
+                <a:latin typeface="Plus Jakarta Sans"/>
+              </a:defRPr>
+            </a:pPr>
+            <a:r>
+              <a:t>Capitulo curto (3-5 mil palavras) submetido ao orientador</a:t>
+            </a:r>
+          </a:p>
+        </p:txBody>
+      </p:sp>
+      <p:sp>
+        <p:nvSpPr>
+          <p:cNvPr id="28" name="Rounded Rectangle 27"/>
+          <p:cNvSpPr/>
+          <p:nvPr/>
+        </p:nvSpPr>
+        <p:spPr>
+          <a:xfrm>
+            <a:off x="6400800" y="2331720"/>
+            <a:ext cx="5486400" cy="4023360"/>
+          </a:xfrm>
+          <a:prstGeom prst="roundRect">
+            <a:avLst/>
+          </a:prstGeom>
+          <a:solidFill>
+            <a:srgbClr val="2D453E"/>
+          </a:solidFill>
+          <a:ln w="6350">
+            <a:solidFill>
+              <a:srgbClr val="C0392B"/>
+            </a:solidFill>
+          </a:ln>
+        </p:spPr>
+        <p:style>
+          <a:lnRef idx="1">
+            <a:schemeClr val="accent1"/>
+          </a:lnRef>
+          <a:fillRef idx="3">
+            <a:schemeClr val="accent1"/>
+          </a:fillRef>
+          <a:effectRef idx="2">
+            <a:schemeClr val="accent1"/>
+          </a:effectRef>
+          <a:fontRef idx="minor">
+            <a:schemeClr val="lt1"/>
+          </a:fontRef>
+        </p:style>
+        <p:txBody>
+          <a:bodyPr rtlCol="0" anchor="ctr"/>
+          <a:lstStyle/>
+          <a:p>
+            <a:pPr algn="ctr"/>
+          </a:p>
+        </p:txBody>
+      </p:sp>
+      <p:sp>
+        <p:nvSpPr>
+          <p:cNvPr id="29" name="TextBox 28"/>
+          <p:cNvSpPr txBox="1"/>
+          <p:nvPr/>
+        </p:nvSpPr>
+        <p:spPr>
+          <a:xfrm>
+            <a:off x="6583680" y="2468880"/>
+            <a:ext cx="5212080" cy="320040"/>
+          </a:xfrm>
+          <a:prstGeom prst="rect">
+            <a:avLst/>
+          </a:prstGeom>
+          <a:noFill/>
+        </p:spPr>
+        <p:txBody>
+          <a:bodyPr wrap="square" lIns="0" rIns="0" tIns="0" bIns="0">
+            <a:spAutoFit/>
+          </a:bodyPr>
+          <a:lstStyle/>
+          <a:p>
+            <a:pPr algn="l">
+              <a:defRPr sz="1200" b="1">
+                <a:solidFill>
+                  <a:srgbClr val="C0392B"/>
+                </a:solidFill>
+                <a:latin typeface="Plus Jakarta Sans"/>
+              </a:defRPr>
+            </a:pPr>
+            <a:r>
+              <a:t>✗ NAO FACA NAS PRIMEIRAS 2 SEMANAS</a:t>
+            </a:r>
+          </a:p>
+        </p:txBody>
+      </p:sp>
+      <p:sp>
+        <p:nvSpPr>
+          <p:cNvPr id="30" name="TextBox 29"/>
+          <p:cNvSpPr txBox="1"/>
+          <p:nvPr/>
+        </p:nvSpPr>
+        <p:spPr>
+          <a:xfrm>
+            <a:off x="6583680" y="2743200"/>
+            <a:ext cx="5212080" cy="274320"/>
           </a:xfrm>
           <a:prstGeom prst="rect">
             <a:avLst/>
@@ -17391,27 +20772,969 @@
             <a:pPr algn="l">
               <a:defRPr sz="1000" b="0">
                 <a:solidFill>
-                  <a:srgbClr val="D4C878"/>
-                </a:solidFill>
-                <a:latin typeface="IBM Plex Mono"/>
-              </a:defRPr>
-            </a:pPr>
-            <a:r>
-              <a:t>Manual completo: github.com/byfabioviana/agent-study-assistant</a:t>
-            </a:r>
-          </a:p>
-        </p:txBody>
-      </p:sp>
-      <p:sp>
-        <p:nvSpPr>
-          <p:cNvPr id="19" name="TextBox 18"/>
-          <p:cNvSpPr txBox="1"/>
-          <p:nvPr/>
-        </p:nvSpPr>
-        <p:spPr>
-          <a:xfrm>
-            <a:off x="1097280" y="6537960"/>
-            <a:ext cx="10058400" cy="274320"/>
+                  <a:srgbClr val="AAAAAA"/>
+                </a:solidFill>
+                <a:latin typeface="Plus Jakarta Sans"/>
+              </a:defRPr>
+            </a:pPr>
+            <a:r>
+              <a:t>Erros que comprometem todo o resto</a:t>
+            </a:r>
+          </a:p>
+        </p:txBody>
+      </p:sp>
+      <p:sp>
+        <p:nvSpPr>
+          <p:cNvPr id="31" name="Rounded Rectangle 30"/>
+          <p:cNvSpPr/>
+          <p:nvPr/>
+        </p:nvSpPr>
+        <p:spPr>
+          <a:xfrm>
+            <a:off x="6583680" y="3108960"/>
+            <a:ext cx="292608" cy="292608"/>
+          </a:xfrm>
+          <a:prstGeom prst="roundRect">
+            <a:avLst/>
+          </a:prstGeom>
+          <a:solidFill>
+            <a:srgbClr val="C0392B"/>
+          </a:solidFill>
+          <a:ln>
+            <a:noFill/>
+          </a:ln>
+        </p:spPr>
+        <p:style>
+          <a:lnRef idx="1">
+            <a:schemeClr val="accent1"/>
+          </a:lnRef>
+          <a:fillRef idx="3">
+            <a:schemeClr val="accent1"/>
+          </a:fillRef>
+          <a:effectRef idx="2">
+            <a:schemeClr val="accent1"/>
+          </a:effectRef>
+          <a:fontRef idx="minor">
+            <a:schemeClr val="lt1"/>
+          </a:fontRef>
+        </p:style>
+        <p:txBody>
+          <a:bodyPr rtlCol="0" anchor="ctr"/>
+          <a:lstStyle/>
+          <a:p>
+            <a:pPr algn="ctr"/>
+          </a:p>
+        </p:txBody>
+      </p:sp>
+      <p:sp>
+        <p:nvSpPr>
+          <p:cNvPr id="32" name="TextBox 31"/>
+          <p:cNvSpPr txBox="1"/>
+          <p:nvPr/>
+        </p:nvSpPr>
+        <p:spPr>
+          <a:xfrm>
+            <a:off x="6583680" y="3127248"/>
+            <a:ext cx="292608" cy="274320"/>
+          </a:xfrm>
+          <a:prstGeom prst="rect">
+            <a:avLst/>
+          </a:prstGeom>
+          <a:noFill/>
+        </p:spPr>
+        <p:txBody>
+          <a:bodyPr wrap="square" lIns="0" rIns="0" tIns="0" bIns="0">
+            <a:spAutoFit/>
+          </a:bodyPr>
+          <a:lstStyle/>
+          <a:p>
+            <a:pPr algn="ctr">
+              <a:defRPr sz="1300" b="1">
+                <a:solidFill>
+                  <a:srgbClr val="FFFFFF"/>
+                </a:solidFill>
+                <a:latin typeface="Plus Jakarta Sans"/>
+              </a:defRPr>
+            </a:pPr>
+            <a:r>
+              <a:t>X</a:t>
+            </a:r>
+          </a:p>
+        </p:txBody>
+      </p:sp>
+      <p:sp>
+        <p:nvSpPr>
+          <p:cNvPr id="33" name="TextBox 32"/>
+          <p:cNvSpPr txBox="1"/>
+          <p:nvPr/>
+        </p:nvSpPr>
+        <p:spPr>
+          <a:xfrm>
+            <a:off x="6995160" y="3108960"/>
+            <a:ext cx="4754880" cy="274320"/>
+          </a:xfrm>
+          <a:prstGeom prst="rect">
+            <a:avLst/>
+          </a:prstGeom>
+          <a:noFill/>
+        </p:spPr>
+        <p:txBody>
+          <a:bodyPr wrap="square" lIns="0" rIns="0" tIns="0" bIns="0">
+            <a:spAutoFit/>
+          </a:bodyPr>
+          <a:lstStyle/>
+          <a:p>
+            <a:pPr algn="l">
+              <a:defRPr sz="1100" b="1">
+                <a:solidFill>
+                  <a:srgbClr val="FFFFFF"/>
+                </a:solidFill>
+                <a:latin typeface="Plus Jakarta Sans"/>
+              </a:defRPr>
+            </a:pPr>
+            <a:r>
+              <a:t>Pular calibracao de voz</a:t>
+            </a:r>
+          </a:p>
+        </p:txBody>
+      </p:sp>
+      <p:sp>
+        <p:nvSpPr>
+          <p:cNvPr id="34" name="TextBox 33"/>
+          <p:cNvSpPr txBox="1"/>
+          <p:nvPr/>
+        </p:nvSpPr>
+        <p:spPr>
+          <a:xfrm>
+            <a:off x="6995160" y="3355848"/>
+            <a:ext cx="4754880" cy="274320"/>
+          </a:xfrm>
+          <a:prstGeom prst="rect">
+            <a:avLst/>
+          </a:prstGeom>
+          <a:noFill/>
+        </p:spPr>
+        <p:txBody>
+          <a:bodyPr wrap="square" lIns="0" rIns="0" tIns="0" bIns="0">
+            <a:spAutoFit/>
+          </a:bodyPr>
+          <a:lstStyle/>
+          <a:p>
+            <a:pPr algn="l">
+              <a:defRPr sz="900" b="0">
+                <a:solidFill>
+                  <a:srgbClr val="AAAAAA"/>
+                </a:solidFill>
+                <a:latin typeface="Plus Jakarta Sans"/>
+              </a:defRPr>
+            </a:pPr>
+            <a:r>
+              <a:t>Auditor + humanizer perdem 70% da precisao.</a:t>
+            </a:r>
+          </a:p>
+        </p:txBody>
+      </p:sp>
+      <p:sp>
+        <p:nvSpPr>
+          <p:cNvPr id="35" name="Rounded Rectangle 34"/>
+          <p:cNvSpPr/>
+          <p:nvPr/>
+        </p:nvSpPr>
+        <p:spPr>
+          <a:xfrm>
+            <a:off x="6583680" y="3611880"/>
+            <a:ext cx="292608" cy="292608"/>
+          </a:xfrm>
+          <a:prstGeom prst="roundRect">
+            <a:avLst/>
+          </a:prstGeom>
+          <a:solidFill>
+            <a:srgbClr val="C0392B"/>
+          </a:solidFill>
+          <a:ln>
+            <a:noFill/>
+          </a:ln>
+        </p:spPr>
+        <p:style>
+          <a:lnRef idx="1">
+            <a:schemeClr val="accent1"/>
+          </a:lnRef>
+          <a:fillRef idx="3">
+            <a:schemeClr val="accent1"/>
+          </a:fillRef>
+          <a:effectRef idx="2">
+            <a:schemeClr val="accent1"/>
+          </a:effectRef>
+          <a:fontRef idx="minor">
+            <a:schemeClr val="lt1"/>
+          </a:fontRef>
+        </p:style>
+        <p:txBody>
+          <a:bodyPr rtlCol="0" anchor="ctr"/>
+          <a:lstStyle/>
+          <a:p>
+            <a:pPr algn="ctr"/>
+          </a:p>
+        </p:txBody>
+      </p:sp>
+      <p:sp>
+        <p:nvSpPr>
+          <p:cNvPr id="36" name="TextBox 35"/>
+          <p:cNvSpPr txBox="1"/>
+          <p:nvPr/>
+        </p:nvSpPr>
+        <p:spPr>
+          <a:xfrm>
+            <a:off x="6583680" y="3630168"/>
+            <a:ext cx="292608" cy="274320"/>
+          </a:xfrm>
+          <a:prstGeom prst="rect">
+            <a:avLst/>
+          </a:prstGeom>
+          <a:noFill/>
+        </p:spPr>
+        <p:txBody>
+          <a:bodyPr wrap="square" lIns="0" rIns="0" tIns="0" bIns="0">
+            <a:spAutoFit/>
+          </a:bodyPr>
+          <a:lstStyle/>
+          <a:p>
+            <a:pPr algn="ctr">
+              <a:defRPr sz="1300" b="1">
+                <a:solidFill>
+                  <a:srgbClr val="FFFFFF"/>
+                </a:solidFill>
+                <a:latin typeface="Plus Jakarta Sans"/>
+              </a:defRPr>
+            </a:pPr>
+            <a:r>
+              <a:t>X</a:t>
+            </a:r>
+          </a:p>
+        </p:txBody>
+      </p:sp>
+      <p:sp>
+        <p:nvSpPr>
+          <p:cNvPr id="37" name="TextBox 36"/>
+          <p:cNvSpPr txBox="1"/>
+          <p:nvPr/>
+        </p:nvSpPr>
+        <p:spPr>
+          <a:xfrm>
+            <a:off x="6995160" y="3611880"/>
+            <a:ext cx="4754880" cy="274320"/>
+          </a:xfrm>
+          <a:prstGeom prst="rect">
+            <a:avLst/>
+          </a:prstGeom>
+          <a:noFill/>
+        </p:spPr>
+        <p:txBody>
+          <a:bodyPr wrap="square" lIns="0" rIns="0" tIns="0" bIns="0">
+            <a:spAutoFit/>
+          </a:bodyPr>
+          <a:lstStyle/>
+          <a:p>
+            <a:pPr algn="l">
+              <a:defRPr sz="1100" b="1">
+                <a:solidFill>
+                  <a:srgbClr val="FFFFFF"/>
+                </a:solidFill>
+                <a:latin typeface="Plus Jakarta Sans"/>
+              </a:defRPr>
+            </a:pPr>
+            <a:r>
+              <a:t>voice-humanizer antes do auditor</a:t>
+            </a:r>
+          </a:p>
+        </p:txBody>
+      </p:sp>
+      <p:sp>
+        <p:nvSpPr>
+          <p:cNvPr id="38" name="TextBox 37"/>
+          <p:cNvSpPr txBox="1"/>
+          <p:nvPr/>
+        </p:nvSpPr>
+        <p:spPr>
+          <a:xfrm>
+            <a:off x="6995160" y="3858768"/>
+            <a:ext cx="4754880" cy="274320"/>
+          </a:xfrm>
+          <a:prstGeom prst="rect">
+            <a:avLst/>
+          </a:prstGeom>
+          <a:noFill/>
+        </p:spPr>
+        <p:txBody>
+          <a:bodyPr wrap="square" lIns="0" rIns="0" tIns="0" bIns="0">
+            <a:spAutoFit/>
+          </a:bodyPr>
+          <a:lstStyle/>
+          <a:p>
+            <a:pPr algn="l">
+              <a:defRPr sz="900" b="0">
+                <a:solidFill>
+                  <a:srgbClr val="AAAAAA"/>
+                </a:solidFill>
+                <a:latin typeface="Plus Jakarta Sans"/>
+              </a:defRPr>
+            </a:pPr>
+            <a:r>
+              <a:t>Reescreve no escuro. Sempre auditor primeiro.</a:t>
+            </a:r>
+          </a:p>
+        </p:txBody>
+      </p:sp>
+      <p:sp>
+        <p:nvSpPr>
+          <p:cNvPr id="39" name="Rounded Rectangle 38"/>
+          <p:cNvSpPr/>
+          <p:nvPr/>
+        </p:nvSpPr>
+        <p:spPr>
+          <a:xfrm>
+            <a:off x="6583680" y="4114800"/>
+            <a:ext cx="292608" cy="292608"/>
+          </a:xfrm>
+          <a:prstGeom prst="roundRect">
+            <a:avLst/>
+          </a:prstGeom>
+          <a:solidFill>
+            <a:srgbClr val="C0392B"/>
+          </a:solidFill>
+          <a:ln>
+            <a:noFill/>
+          </a:ln>
+        </p:spPr>
+        <p:style>
+          <a:lnRef idx="1">
+            <a:schemeClr val="accent1"/>
+          </a:lnRef>
+          <a:fillRef idx="3">
+            <a:schemeClr val="accent1"/>
+          </a:fillRef>
+          <a:effectRef idx="2">
+            <a:schemeClr val="accent1"/>
+          </a:effectRef>
+          <a:fontRef idx="minor">
+            <a:schemeClr val="lt1"/>
+          </a:fontRef>
+        </p:style>
+        <p:txBody>
+          <a:bodyPr rtlCol="0" anchor="ctr"/>
+          <a:lstStyle/>
+          <a:p>
+            <a:pPr algn="ctr"/>
+          </a:p>
+        </p:txBody>
+      </p:sp>
+      <p:sp>
+        <p:nvSpPr>
+          <p:cNvPr id="40" name="TextBox 39"/>
+          <p:cNvSpPr txBox="1"/>
+          <p:nvPr/>
+        </p:nvSpPr>
+        <p:spPr>
+          <a:xfrm>
+            <a:off x="6583680" y="4133088"/>
+            <a:ext cx="292608" cy="274320"/>
+          </a:xfrm>
+          <a:prstGeom prst="rect">
+            <a:avLst/>
+          </a:prstGeom>
+          <a:noFill/>
+        </p:spPr>
+        <p:txBody>
+          <a:bodyPr wrap="square" lIns="0" rIns="0" tIns="0" bIns="0">
+            <a:spAutoFit/>
+          </a:bodyPr>
+          <a:lstStyle/>
+          <a:p>
+            <a:pPr algn="ctr">
+              <a:defRPr sz="1300" b="1">
+                <a:solidFill>
+                  <a:srgbClr val="FFFFFF"/>
+                </a:solidFill>
+                <a:latin typeface="Plus Jakarta Sans"/>
+              </a:defRPr>
+            </a:pPr>
+            <a:r>
+              <a:t>X</a:t>
+            </a:r>
+          </a:p>
+        </p:txBody>
+      </p:sp>
+      <p:sp>
+        <p:nvSpPr>
+          <p:cNvPr id="41" name="TextBox 40"/>
+          <p:cNvSpPr txBox="1"/>
+          <p:nvPr/>
+        </p:nvSpPr>
+        <p:spPr>
+          <a:xfrm>
+            <a:off x="6995160" y="4114800"/>
+            <a:ext cx="4754880" cy="274320"/>
+          </a:xfrm>
+          <a:prstGeom prst="rect">
+            <a:avLst/>
+          </a:prstGeom>
+          <a:noFill/>
+        </p:spPr>
+        <p:txBody>
+          <a:bodyPr wrap="square" lIns="0" rIns="0" tIns="0" bIns="0">
+            <a:spAutoFit/>
+          </a:bodyPr>
+          <a:lstStyle/>
+          <a:p>
+            <a:pPr algn="l">
+              <a:defRPr sz="1100" b="1">
+                <a:solidFill>
+                  <a:srgbClr val="FFFFFF"/>
+                </a:solidFill>
+                <a:latin typeface="Plus Jakarta Sans"/>
+              </a:defRPr>
+            </a:pPr>
+            <a:r>
+              <a:t>Aceitar fontes sem validar</a:t>
+            </a:r>
+          </a:p>
+        </p:txBody>
+      </p:sp>
+      <p:sp>
+        <p:nvSpPr>
+          <p:cNvPr id="42" name="TextBox 41"/>
+          <p:cNvSpPr txBox="1"/>
+          <p:nvPr/>
+        </p:nvSpPr>
+        <p:spPr>
+          <a:xfrm>
+            <a:off x="6995160" y="4361688"/>
+            <a:ext cx="4754880" cy="274320"/>
+          </a:xfrm>
+          <a:prstGeom prst="rect">
+            <a:avLst/>
+          </a:prstGeom>
+          <a:noFill/>
+        </p:spPr>
+        <p:txBody>
+          <a:bodyPr wrap="square" lIns="0" rIns="0" tIns="0" bIns="0">
+            <a:spAutoFit/>
+          </a:bodyPr>
+          <a:lstStyle/>
+          <a:p>
+            <a:pPr algn="l">
+              <a:defRPr sz="900" b="0">
+                <a:solidFill>
+                  <a:srgbClr val="AAAAAA"/>
+                </a:solidFill>
+                <a:latin typeface="Plus Jakarta Sans"/>
+              </a:defRPr>
+            </a:pPr>
+            <a:r>
+              <a:t>DOI alucinado escapa direto para a banca.</a:t>
+            </a:r>
+          </a:p>
+        </p:txBody>
+      </p:sp>
+      <p:sp>
+        <p:nvSpPr>
+          <p:cNvPr id="43" name="Rounded Rectangle 42"/>
+          <p:cNvSpPr/>
+          <p:nvPr/>
+        </p:nvSpPr>
+        <p:spPr>
+          <a:xfrm>
+            <a:off x="6583680" y="4617720"/>
+            <a:ext cx="292608" cy="292608"/>
+          </a:xfrm>
+          <a:prstGeom prst="roundRect">
+            <a:avLst/>
+          </a:prstGeom>
+          <a:solidFill>
+            <a:srgbClr val="C0392B"/>
+          </a:solidFill>
+          <a:ln>
+            <a:noFill/>
+          </a:ln>
+        </p:spPr>
+        <p:style>
+          <a:lnRef idx="1">
+            <a:schemeClr val="accent1"/>
+          </a:lnRef>
+          <a:fillRef idx="3">
+            <a:schemeClr val="accent1"/>
+          </a:fillRef>
+          <a:effectRef idx="2">
+            <a:schemeClr val="accent1"/>
+          </a:effectRef>
+          <a:fontRef idx="minor">
+            <a:schemeClr val="lt1"/>
+          </a:fontRef>
+        </p:style>
+        <p:txBody>
+          <a:bodyPr rtlCol="0" anchor="ctr"/>
+          <a:lstStyle/>
+          <a:p>
+            <a:pPr algn="ctr"/>
+          </a:p>
+        </p:txBody>
+      </p:sp>
+      <p:sp>
+        <p:nvSpPr>
+          <p:cNvPr id="44" name="TextBox 43"/>
+          <p:cNvSpPr txBox="1"/>
+          <p:nvPr/>
+        </p:nvSpPr>
+        <p:spPr>
+          <a:xfrm>
+            <a:off x="6583680" y="4636008"/>
+            <a:ext cx="292608" cy="274320"/>
+          </a:xfrm>
+          <a:prstGeom prst="rect">
+            <a:avLst/>
+          </a:prstGeom>
+          <a:noFill/>
+        </p:spPr>
+        <p:txBody>
+          <a:bodyPr wrap="square" lIns="0" rIns="0" tIns="0" bIns="0">
+            <a:spAutoFit/>
+          </a:bodyPr>
+          <a:lstStyle/>
+          <a:p>
+            <a:pPr algn="ctr">
+              <a:defRPr sz="1300" b="1">
+                <a:solidFill>
+                  <a:srgbClr val="FFFFFF"/>
+                </a:solidFill>
+                <a:latin typeface="Plus Jakarta Sans"/>
+              </a:defRPr>
+            </a:pPr>
+            <a:r>
+              <a:t>X</a:t>
+            </a:r>
+          </a:p>
+        </p:txBody>
+      </p:sp>
+      <p:sp>
+        <p:nvSpPr>
+          <p:cNvPr id="45" name="TextBox 44"/>
+          <p:cNvSpPr txBox="1"/>
+          <p:nvPr/>
+        </p:nvSpPr>
+        <p:spPr>
+          <a:xfrm>
+            <a:off x="6995160" y="4617720"/>
+            <a:ext cx="4754880" cy="274320"/>
+          </a:xfrm>
+          <a:prstGeom prst="rect">
+            <a:avLst/>
+          </a:prstGeom>
+          <a:noFill/>
+        </p:spPr>
+        <p:txBody>
+          <a:bodyPr wrap="square" lIns="0" rIns="0" tIns="0" bIns="0">
+            <a:spAutoFit/>
+          </a:bodyPr>
+          <a:lstStyle/>
+          <a:p>
+            <a:pPr algn="l">
+              <a:defRPr sz="1100" b="1">
+                <a:solidFill>
+                  <a:srgbClr val="FFFFFF"/>
+                </a:solidFill>
+                <a:latin typeface="Plus Jakarta Sans"/>
+              </a:defRPr>
+            </a:pPr>
+            <a:r>
+              <a:t>Redigir capitulo inteiro de uma vez</a:t>
+            </a:r>
+          </a:p>
+        </p:txBody>
+      </p:sp>
+      <p:sp>
+        <p:nvSpPr>
+          <p:cNvPr id="46" name="TextBox 45"/>
+          <p:cNvSpPr txBox="1"/>
+          <p:nvPr/>
+        </p:nvSpPr>
+        <p:spPr>
+          <a:xfrm>
+            <a:off x="6995160" y="4864608"/>
+            <a:ext cx="4754880" cy="274320"/>
+          </a:xfrm>
+          <a:prstGeom prst="rect">
+            <a:avLst/>
+          </a:prstGeom>
+          <a:noFill/>
+        </p:spPr>
+        <p:txBody>
+          <a:bodyPr wrap="square" lIns="0" rIns="0" tIns="0" bIns="0">
+            <a:spAutoFit/>
+          </a:bodyPr>
+          <a:lstStyle/>
+          <a:p>
+            <a:pPr algn="l">
+              <a:defRPr sz="900" b="0">
+                <a:solidFill>
+                  <a:srgbClr val="AAAAAA"/>
+                </a:solidFill>
+                <a:latin typeface="Plus Jakarta Sans"/>
+              </a:defRPr>
+            </a:pPr>
+            <a:r>
+              <a:t>Quebre em secoes de 1500-2000 palavras.</a:t>
+            </a:r>
+          </a:p>
+        </p:txBody>
+      </p:sp>
+      <p:sp>
+        <p:nvSpPr>
+          <p:cNvPr id="47" name="Rounded Rectangle 46"/>
+          <p:cNvSpPr/>
+          <p:nvPr/>
+        </p:nvSpPr>
+        <p:spPr>
+          <a:xfrm>
+            <a:off x="6583680" y="5120640"/>
+            <a:ext cx="292608" cy="292608"/>
+          </a:xfrm>
+          <a:prstGeom prst="roundRect">
+            <a:avLst/>
+          </a:prstGeom>
+          <a:solidFill>
+            <a:srgbClr val="C0392B"/>
+          </a:solidFill>
+          <a:ln>
+            <a:noFill/>
+          </a:ln>
+        </p:spPr>
+        <p:style>
+          <a:lnRef idx="1">
+            <a:schemeClr val="accent1"/>
+          </a:lnRef>
+          <a:fillRef idx="3">
+            <a:schemeClr val="accent1"/>
+          </a:fillRef>
+          <a:effectRef idx="2">
+            <a:schemeClr val="accent1"/>
+          </a:effectRef>
+          <a:fontRef idx="minor">
+            <a:schemeClr val="lt1"/>
+          </a:fontRef>
+        </p:style>
+        <p:txBody>
+          <a:bodyPr rtlCol="0" anchor="ctr"/>
+          <a:lstStyle/>
+          <a:p>
+            <a:pPr algn="ctr"/>
+          </a:p>
+        </p:txBody>
+      </p:sp>
+      <p:sp>
+        <p:nvSpPr>
+          <p:cNvPr id="48" name="TextBox 47"/>
+          <p:cNvSpPr txBox="1"/>
+          <p:nvPr/>
+        </p:nvSpPr>
+        <p:spPr>
+          <a:xfrm>
+            <a:off x="6583680" y="5138928"/>
+            <a:ext cx="292608" cy="274320"/>
+          </a:xfrm>
+          <a:prstGeom prst="rect">
+            <a:avLst/>
+          </a:prstGeom>
+          <a:noFill/>
+        </p:spPr>
+        <p:txBody>
+          <a:bodyPr wrap="square" lIns="0" rIns="0" tIns="0" bIns="0">
+            <a:spAutoFit/>
+          </a:bodyPr>
+          <a:lstStyle/>
+          <a:p>
+            <a:pPr algn="ctr">
+              <a:defRPr sz="1300" b="1">
+                <a:solidFill>
+                  <a:srgbClr val="FFFFFF"/>
+                </a:solidFill>
+                <a:latin typeface="Plus Jakarta Sans"/>
+              </a:defRPr>
+            </a:pPr>
+            <a:r>
+              <a:t>X</a:t>
+            </a:r>
+          </a:p>
+        </p:txBody>
+      </p:sp>
+      <p:sp>
+        <p:nvSpPr>
+          <p:cNvPr id="49" name="TextBox 48"/>
+          <p:cNvSpPr txBox="1"/>
+          <p:nvPr/>
+        </p:nvSpPr>
+        <p:spPr>
+          <a:xfrm>
+            <a:off x="6995160" y="5120640"/>
+            <a:ext cx="4754880" cy="274320"/>
+          </a:xfrm>
+          <a:prstGeom prst="rect">
+            <a:avLst/>
+          </a:prstGeom>
+          <a:noFill/>
+        </p:spPr>
+        <p:txBody>
+          <a:bodyPr wrap="square" lIns="0" rIns="0" tIns="0" bIns="0">
+            <a:spAutoFit/>
+          </a:bodyPr>
+          <a:lstStyle/>
+          <a:p>
+            <a:pPr algn="l">
+              <a:defRPr sz="1100" b="1">
+                <a:solidFill>
+                  <a:srgbClr val="FFFFFF"/>
+                </a:solidFill>
+                <a:latin typeface="Plus Jakarta Sans"/>
+              </a:defRPr>
+            </a:pPr>
+            <a:r>
+              <a:t>Mexer em memory/ durante execucao</a:t>
+            </a:r>
+          </a:p>
+        </p:txBody>
+      </p:sp>
+      <p:sp>
+        <p:nvSpPr>
+          <p:cNvPr id="50" name="TextBox 49"/>
+          <p:cNvSpPr txBox="1"/>
+          <p:nvPr/>
+        </p:nvSpPr>
+        <p:spPr>
+          <a:xfrm>
+            <a:off x="6995160" y="5367528"/>
+            <a:ext cx="4754880" cy="274320"/>
+          </a:xfrm>
+          <a:prstGeom prst="rect">
+            <a:avLst/>
+          </a:prstGeom>
+          <a:noFill/>
+        </p:spPr>
+        <p:txBody>
+          <a:bodyPr wrap="square" lIns="0" rIns="0" tIns="0" bIns="0">
+            <a:spAutoFit/>
+          </a:bodyPr>
+          <a:lstStyle/>
+          <a:p>
+            <a:pPr algn="l">
+              <a:defRPr sz="900" b="0">
+                <a:solidFill>
+                  <a:srgbClr val="AAAAAA"/>
+                </a:solidFill>
+                <a:latin typeface="Plus Jakarta Sans"/>
+              </a:defRPr>
+            </a:pPr>
+            <a:r>
+              <a:t>Pode causar corrupcao de contexto do agente.</a:t>
+            </a:r>
+          </a:p>
+        </p:txBody>
+      </p:sp>
+      <p:sp>
+        <p:nvSpPr>
+          <p:cNvPr id="51" name="Rounded Rectangle 50"/>
+          <p:cNvSpPr/>
+          <p:nvPr/>
+        </p:nvSpPr>
+        <p:spPr>
+          <a:xfrm>
+            <a:off x="6583680" y="5623560"/>
+            <a:ext cx="292608" cy="292608"/>
+          </a:xfrm>
+          <a:prstGeom prst="roundRect">
+            <a:avLst/>
+          </a:prstGeom>
+          <a:solidFill>
+            <a:srgbClr val="C0392B"/>
+          </a:solidFill>
+          <a:ln>
+            <a:noFill/>
+          </a:ln>
+        </p:spPr>
+        <p:style>
+          <a:lnRef idx="1">
+            <a:schemeClr val="accent1"/>
+          </a:lnRef>
+          <a:fillRef idx="3">
+            <a:schemeClr val="accent1"/>
+          </a:fillRef>
+          <a:effectRef idx="2">
+            <a:schemeClr val="accent1"/>
+          </a:effectRef>
+          <a:fontRef idx="minor">
+            <a:schemeClr val="lt1"/>
+          </a:fontRef>
+        </p:style>
+        <p:txBody>
+          <a:bodyPr rtlCol="0" anchor="ctr"/>
+          <a:lstStyle/>
+          <a:p>
+            <a:pPr algn="ctr"/>
+          </a:p>
+        </p:txBody>
+      </p:sp>
+      <p:sp>
+        <p:nvSpPr>
+          <p:cNvPr id="52" name="TextBox 51"/>
+          <p:cNvSpPr txBox="1"/>
+          <p:nvPr/>
+        </p:nvSpPr>
+        <p:spPr>
+          <a:xfrm>
+            <a:off x="6583680" y="5641848"/>
+            <a:ext cx="292608" cy="274320"/>
+          </a:xfrm>
+          <a:prstGeom prst="rect">
+            <a:avLst/>
+          </a:prstGeom>
+          <a:noFill/>
+        </p:spPr>
+        <p:txBody>
+          <a:bodyPr wrap="square" lIns="0" rIns="0" tIns="0" bIns="0">
+            <a:spAutoFit/>
+          </a:bodyPr>
+          <a:lstStyle/>
+          <a:p>
+            <a:pPr algn="ctr">
+              <a:defRPr sz="1300" b="1">
+                <a:solidFill>
+                  <a:srgbClr val="FFFFFF"/>
+                </a:solidFill>
+                <a:latin typeface="Plus Jakarta Sans"/>
+              </a:defRPr>
+            </a:pPr>
+            <a:r>
+              <a:t>X</a:t>
+            </a:r>
+          </a:p>
+        </p:txBody>
+      </p:sp>
+      <p:sp>
+        <p:nvSpPr>
+          <p:cNvPr id="53" name="TextBox 52"/>
+          <p:cNvSpPr txBox="1"/>
+          <p:nvPr/>
+        </p:nvSpPr>
+        <p:spPr>
+          <a:xfrm>
+            <a:off x="6995160" y="5623560"/>
+            <a:ext cx="4754880" cy="274320"/>
+          </a:xfrm>
+          <a:prstGeom prst="rect">
+            <a:avLst/>
+          </a:prstGeom>
+          <a:noFill/>
+        </p:spPr>
+        <p:txBody>
+          <a:bodyPr wrap="square" lIns="0" rIns="0" tIns="0" bIns="0">
+            <a:spAutoFit/>
+          </a:bodyPr>
+          <a:lstStyle/>
+          <a:p>
+            <a:pPr algn="l">
+              <a:defRPr sz="1100" b="1">
+                <a:solidFill>
+                  <a:srgbClr val="FFFFFF"/>
+                </a:solidFill>
+                <a:latin typeface="Plus Jakarta Sans"/>
+              </a:defRPr>
+            </a:pPr>
+            <a:r>
+              <a:t>Nao atualizar feedback_writing.md</a:t>
+            </a:r>
+          </a:p>
+        </p:txBody>
+      </p:sp>
+      <p:sp>
+        <p:nvSpPr>
+          <p:cNvPr id="54" name="TextBox 53"/>
+          <p:cNvSpPr txBox="1"/>
+          <p:nvPr/>
+        </p:nvSpPr>
+        <p:spPr>
+          <a:xfrm>
+            <a:off x="6995160" y="5870448"/>
+            <a:ext cx="4754880" cy="274320"/>
+          </a:xfrm>
+          <a:prstGeom prst="rect">
+            <a:avLst/>
+          </a:prstGeom>
+          <a:noFill/>
+        </p:spPr>
+        <p:txBody>
+          <a:bodyPr wrap="square" lIns="0" rIns="0" tIns="0" bIns="0">
+            <a:spAutoFit/>
+          </a:bodyPr>
+          <a:lstStyle/>
+          <a:p>
+            <a:pPr algn="l">
+              <a:defRPr sz="900" b="0">
+                <a:solidFill>
+                  <a:srgbClr val="AAAAAA"/>
+                </a:solidFill>
+                <a:latin typeface="Plus Jakarta Sans"/>
+              </a:defRPr>
+            </a:pPr>
+            <a:r>
+              <a:t>Voce corrige a mesma coisa toda semana.</a:t>
+            </a:r>
+          </a:p>
+        </p:txBody>
+      </p:sp>
+      <p:sp>
+        <p:nvSpPr>
+          <p:cNvPr id="55" name="TextBox 54"/>
+          <p:cNvSpPr txBox="1"/>
+          <p:nvPr/>
+        </p:nvSpPr>
+        <p:spPr>
+          <a:xfrm>
+            <a:off x="1097280" y="6446520"/>
+            <a:ext cx="7315200" cy="320040"/>
+          </a:xfrm>
+          <a:prstGeom prst="rect">
+            <a:avLst/>
+          </a:prstGeom>
+          <a:noFill/>
+        </p:spPr>
+        <p:txBody>
+          <a:bodyPr wrap="square" lIns="0" rIns="0" tIns="0" bIns="0">
+            <a:spAutoFit/>
+          </a:bodyPr>
+          <a:lstStyle/>
+          <a:p>
+            <a:pPr algn="l">
+              <a:defRPr sz="900" b="0">
+                <a:solidFill>
+                  <a:srgbClr val="888888"/>
+                </a:solidFill>
+                <a:latin typeface="Plus Jakarta Sans"/>
+              </a:defRPr>
+            </a:pPr>
+            <a:r>
+              <a:t>Manual de Uso  |  Agent Study Assistant  |  Verticalis AI Journey</a:t>
+            </a:r>
+          </a:p>
+        </p:txBody>
+      </p:sp>
+      <p:sp>
+        <p:nvSpPr>
+          <p:cNvPr id="56" name="TextBox 55"/>
+          <p:cNvSpPr txBox="1"/>
+          <p:nvPr/>
+        </p:nvSpPr>
+        <p:spPr>
+          <a:xfrm>
+            <a:off x="10058400" y="6446520"/>
+            <a:ext cx="1371600" cy="320040"/>
           </a:xfrm>
           <a:prstGeom prst="rect">
             <a:avLst/>
@@ -17433,7 +21756,7 @@
               </a:defRPr>
             </a:pPr>
             <a:r>
-              <a:t>Verticalis AI Journey  •  Education  •  Maio 2026  •  v1.0</a:t>
+              <a:t>19 / 20</a:t>
             </a:r>
           </a:p>
         </p:txBody>
@@ -18595,6 +22918,222 @@
         </p:nvSpPr>
         <p:spPr>
           <a:xfrm>
+            <a:off x="1097280" y="6053328"/>
+            <a:ext cx="548640" cy="365760"/>
+          </a:xfrm>
+          <a:prstGeom prst="rect">
+            <a:avLst/>
+          </a:prstGeom>
+          <a:noFill/>
+        </p:spPr>
+        <p:txBody>
+          <a:bodyPr wrap="square" lIns="0" rIns="0" tIns="0" bIns="0">
+            <a:spAutoFit/>
+          </a:bodyPr>
+          <a:lstStyle/>
+          <a:p>
+            <a:pPr algn="l">
+              <a:defRPr sz="1300" b="1">
+                <a:solidFill>
+                  <a:srgbClr val="C5B358"/>
+                </a:solidFill>
+                <a:latin typeface="IBM Plex Mono"/>
+              </a:defRPr>
+            </a:pPr>
+            <a:r>
+              <a:t>07</a:t>
+            </a:r>
+          </a:p>
+        </p:txBody>
+      </p:sp>
+      <p:sp>
+        <p:nvSpPr>
+          <p:cNvPr id="34" name="TextBox 33"/>
+          <p:cNvSpPr txBox="1"/>
+          <p:nvPr/>
+        </p:nvSpPr>
+        <p:spPr>
+          <a:xfrm>
+            <a:off x="1828800" y="6053328"/>
+            <a:ext cx="4114800" cy="365760"/>
+          </a:xfrm>
+          <a:prstGeom prst="rect">
+            <a:avLst/>
+          </a:prstGeom>
+          <a:noFill/>
+        </p:spPr>
+        <p:txBody>
+          <a:bodyPr wrap="square" lIns="0" rIns="0" tIns="0" bIns="0">
+            <a:spAutoFit/>
+          </a:bodyPr>
+          <a:lstStyle/>
+          <a:p>
+            <a:pPr algn="l">
+              <a:defRPr sz="1500" b="1">
+                <a:solidFill>
+                  <a:srgbClr val="1E1E1E"/>
+                </a:solidFill>
+                <a:latin typeface="Plus Jakarta Sans"/>
+              </a:defRPr>
+            </a:pPr>
+            <a:r>
+              <a:t>Roteiro de inicio</a:t>
+            </a:r>
+          </a:p>
+        </p:txBody>
+      </p:sp>
+      <p:sp>
+        <p:nvSpPr>
+          <p:cNvPr id="35" name="TextBox 34"/>
+          <p:cNvSpPr txBox="1"/>
+          <p:nvPr/>
+        </p:nvSpPr>
+        <p:spPr>
+          <a:xfrm>
+            <a:off x="5943600" y="6053328"/>
+            <a:ext cx="6400800" cy="365760"/>
+          </a:xfrm>
+          <a:prstGeom prst="rect">
+            <a:avLst/>
+          </a:prstGeom>
+          <a:noFill/>
+        </p:spPr>
+        <p:txBody>
+          <a:bodyPr wrap="square" lIns="0" rIns="0" tIns="0" bIns="0">
+            <a:spAutoFit/>
+          </a:bodyPr>
+          <a:lstStyle/>
+          <a:p>
+            <a:pPr algn="l">
+              <a:defRPr sz="1300" b="0">
+                <a:solidFill>
+                  <a:srgbClr val="666666"/>
+                </a:solidFill>
+                <a:latin typeface="Plus Jakarta Sans"/>
+              </a:defRPr>
+            </a:pPr>
+            <a:r>
+              <a:t>Seus primeiros 6 passos para destravar o uso</a:t>
+            </a:r>
+          </a:p>
+        </p:txBody>
+      </p:sp>
+      <p:sp>
+        <p:nvSpPr>
+          <p:cNvPr id="36" name="TextBox 35"/>
+          <p:cNvSpPr txBox="1"/>
+          <p:nvPr/>
+        </p:nvSpPr>
+        <p:spPr>
+          <a:xfrm>
+            <a:off x="1097280" y="6437376"/>
+            <a:ext cx="548640" cy="365760"/>
+          </a:xfrm>
+          <a:prstGeom prst="rect">
+            <a:avLst/>
+          </a:prstGeom>
+          <a:noFill/>
+        </p:spPr>
+        <p:txBody>
+          <a:bodyPr wrap="square" lIns="0" rIns="0" tIns="0" bIns="0">
+            <a:spAutoFit/>
+          </a:bodyPr>
+          <a:lstStyle/>
+          <a:p>
+            <a:pPr algn="l">
+              <a:defRPr sz="1300" b="1">
+                <a:solidFill>
+                  <a:srgbClr val="C5B358"/>
+                </a:solidFill>
+                <a:latin typeface="IBM Plex Mono"/>
+              </a:defRPr>
+            </a:pPr>
+            <a:r>
+              <a:t>08</a:t>
+            </a:r>
+          </a:p>
+        </p:txBody>
+      </p:sp>
+      <p:sp>
+        <p:nvSpPr>
+          <p:cNvPr id="37" name="TextBox 36"/>
+          <p:cNvSpPr txBox="1"/>
+          <p:nvPr/>
+        </p:nvSpPr>
+        <p:spPr>
+          <a:xfrm>
+            <a:off x="1828800" y="6437376"/>
+            <a:ext cx="4114800" cy="365760"/>
+          </a:xfrm>
+          <a:prstGeom prst="rect">
+            <a:avLst/>
+          </a:prstGeom>
+          <a:noFill/>
+        </p:spPr>
+        <p:txBody>
+          <a:bodyPr wrap="square" lIns="0" rIns="0" tIns="0" bIns="0">
+            <a:spAutoFit/>
+          </a:bodyPr>
+          <a:lstStyle/>
+          <a:p>
+            <a:pPr algn="l">
+              <a:defRPr sz="1500" b="1">
+                <a:solidFill>
+                  <a:srgbClr val="1E1E1E"/>
+                </a:solidFill>
+                <a:latin typeface="Plus Jakarta Sans"/>
+              </a:defRPr>
+            </a:pPr>
+            <a:r>
+              <a:t>Marcos + anti-padroes</a:t>
+            </a:r>
+          </a:p>
+        </p:txBody>
+      </p:sp>
+      <p:sp>
+        <p:nvSpPr>
+          <p:cNvPr id="38" name="TextBox 37"/>
+          <p:cNvSpPr txBox="1"/>
+          <p:nvPr/>
+        </p:nvSpPr>
+        <p:spPr>
+          <a:xfrm>
+            <a:off x="5943600" y="6437376"/>
+            <a:ext cx="6400800" cy="365760"/>
+          </a:xfrm>
+          <a:prstGeom prst="rect">
+            <a:avLst/>
+          </a:prstGeom>
+          <a:noFill/>
+        </p:spPr>
+        <p:txBody>
+          <a:bodyPr wrap="square" lIns="0" rIns="0" tIns="0" bIns="0">
+            <a:spAutoFit/>
+          </a:bodyPr>
+          <a:lstStyle/>
+          <a:p>
+            <a:pPr algn="l">
+              <a:defRPr sz="1300" b="0">
+                <a:solidFill>
+                  <a:srgbClr val="666666"/>
+                </a:solidFill>
+                <a:latin typeface="Plus Jakarta Sans"/>
+              </a:defRPr>
+            </a:pPr>
+            <a:r>
+              <a:t>Como saber se esta progredindo</a:t>
+            </a:r>
+          </a:p>
+        </p:txBody>
+      </p:sp>
+      <p:sp>
+        <p:nvSpPr>
+          <p:cNvPr id="39" name="TextBox 38"/>
+          <p:cNvSpPr txBox="1"/>
+          <p:nvPr/>
+        </p:nvSpPr>
+        <p:spPr>
+          <a:xfrm>
             <a:off x="1097280" y="6446520"/>
             <a:ext cx="7315200" cy="320040"/>
           </a:xfrm>
@@ -18625,7 +23164,7 @@
       </p:sp>
       <p:sp>
         <p:nvSpPr>
-          <p:cNvPr id="34" name="TextBox 33"/>
+          <p:cNvPr id="40" name="TextBox 39"/>
           <p:cNvSpPr txBox="1"/>
           <p:nvPr/>
         </p:nvSpPr>
@@ -18654,7 +23193,749 @@
               </a:defRPr>
             </a:pPr>
             <a:r>
-              <a:t>02 / 18</a:t>
+              <a:t>02 / 20</a:t>
+            </a:r>
+          </a:p>
+        </p:txBody>
+      </p:sp>
+    </p:spTree>
+  </p:cSld>
+  <p:clrMapOvr>
+    <a:masterClrMapping/>
+  </p:clrMapOvr>
+</p:sld>
+</file>
+
+<file path=ppt/slides/slide20.xml><?xml version="1.0" encoding="utf-8"?>
+<p:sld xmlns:a="http://schemas.openxmlformats.org/drawingml/2006/main" xmlns:p="http://schemas.openxmlformats.org/presentationml/2006/main" xmlns:r="http://schemas.openxmlformats.org/officeDocument/2006/relationships">
+  <p:cSld>
+    <p:bg>
+      <p:bgPr>
+        <a:solidFill>
+          <a:srgbClr val="0B2823"/>
+        </a:solidFill>
+        <a:effectLst/>
+      </p:bgPr>
+    </p:bg>
+    <p:spTree>
+      <p:nvGrpSpPr>
+        <p:cNvPr id="1" name=""/>
+        <p:cNvGrpSpPr/>
+        <p:nvPr/>
+      </p:nvGrpSpPr>
+      <p:grpSpPr/>
+      <p:sp>
+        <p:nvSpPr>
+          <p:cNvPr id="2" name="Rectangle 1"/>
+          <p:cNvSpPr/>
+          <p:nvPr/>
+        </p:nvSpPr>
+        <p:spPr>
+          <a:xfrm>
+            <a:off x="0" y="2377440"/>
+            <a:ext cx="12191695" cy="36576"/>
+          </a:xfrm>
+          <a:prstGeom prst="rect">
+            <a:avLst/>
+          </a:prstGeom>
+          <a:solidFill>
+            <a:srgbClr val="C5B358"/>
+          </a:solidFill>
+          <a:ln>
+            <a:noFill/>
+          </a:ln>
+        </p:spPr>
+        <p:style>
+          <a:lnRef idx="1">
+            <a:schemeClr val="accent1"/>
+          </a:lnRef>
+          <a:fillRef idx="3">
+            <a:schemeClr val="accent1"/>
+          </a:fillRef>
+          <a:effectRef idx="2">
+            <a:schemeClr val="accent1"/>
+          </a:effectRef>
+          <a:fontRef idx="minor">
+            <a:schemeClr val="lt1"/>
+          </a:fontRef>
+        </p:style>
+        <p:txBody>
+          <a:bodyPr rtlCol="0" anchor="ctr"/>
+          <a:lstStyle/>
+          <a:p>
+            <a:pPr algn="ctr"/>
+          </a:p>
+        </p:txBody>
+      </p:sp>
+      <p:sp>
+        <p:nvSpPr>
+          <p:cNvPr id="3" name="TextBox 2"/>
+          <p:cNvSpPr txBox="1"/>
+          <p:nvPr/>
+        </p:nvSpPr>
+        <p:spPr>
+          <a:xfrm>
+            <a:off x="1097280" y="914400"/>
+            <a:ext cx="10058400" cy="365760"/>
+          </a:xfrm>
+          <a:prstGeom prst="rect">
+            <a:avLst/>
+          </a:prstGeom>
+          <a:noFill/>
+        </p:spPr>
+        <p:txBody>
+          <a:bodyPr wrap="square" lIns="0" rIns="0" tIns="0" bIns="0">
+            <a:spAutoFit/>
+          </a:bodyPr>
+          <a:lstStyle/>
+          <a:p>
+            <a:pPr algn="l">
+              <a:defRPr sz="1200" b="1">
+                <a:solidFill>
+                  <a:srgbClr val="D4C878"/>
+                </a:solidFill>
+                <a:latin typeface="Plus Jakarta Sans"/>
+              </a:defRPr>
+            </a:pPr>
+            <a:r>
+              <a:t>ACAO PARA OS PROXIMOS 30 MINUTOS</a:t>
+            </a:r>
+          </a:p>
+        </p:txBody>
+      </p:sp>
+      <p:sp>
+        <p:nvSpPr>
+          <p:cNvPr id="4" name="TextBox 3"/>
+          <p:cNvSpPr txBox="1"/>
+          <p:nvPr/>
+        </p:nvSpPr>
+        <p:spPr>
+          <a:xfrm>
+            <a:off x="1097280" y="1280160"/>
+            <a:ext cx="10058400" cy="822960"/>
+          </a:xfrm>
+          <a:prstGeom prst="rect">
+            <a:avLst/>
+          </a:prstGeom>
+          <a:noFill/>
+        </p:spPr>
+        <p:txBody>
+          <a:bodyPr wrap="square" lIns="0" rIns="0" tIns="0" bIns="0">
+            <a:spAutoFit/>
+          </a:bodyPr>
+          <a:lstStyle/>
+          <a:p>
+            <a:pPr algn="l">
+              <a:defRPr sz="4000" b="1">
+                <a:solidFill>
+                  <a:srgbClr val="FFFFFF"/>
+                </a:solidFill>
+                <a:latin typeface="Lora"/>
+              </a:defRPr>
+            </a:pPr>
+            <a:r>
+              <a:t>Comece pelo fundamento.</a:t>
+            </a:r>
+          </a:p>
+        </p:txBody>
+      </p:sp>
+      <p:sp>
+        <p:nvSpPr>
+          <p:cNvPr id="5" name="TextBox 4"/>
+          <p:cNvSpPr txBox="1"/>
+          <p:nvPr/>
+        </p:nvSpPr>
+        <p:spPr>
+          <a:xfrm>
+            <a:off x="1097280" y="1965960"/>
+            <a:ext cx="10058400" cy="320040"/>
+          </a:xfrm>
+          <a:prstGeom prst="rect">
+            <a:avLst/>
+          </a:prstGeom>
+          <a:noFill/>
+        </p:spPr>
+        <p:txBody>
+          <a:bodyPr wrap="square" lIns="0" rIns="0" tIns="0" bIns="0">
+            <a:spAutoFit/>
+          </a:bodyPr>
+          <a:lstStyle/>
+          <a:p>
+            <a:pPr algn="l">
+              <a:defRPr sz="1600" b="0">
+                <a:solidFill>
+                  <a:srgbClr val="D4C878"/>
+                </a:solidFill>
+                <a:latin typeface="Lora"/>
+              </a:defRPr>
+            </a:pPr>
+            <a:r>
+              <a:t>Voce tem o squad. Voce tem o metodo. Falta dar o primeiro passo.</a:t>
+            </a:r>
+          </a:p>
+        </p:txBody>
+      </p:sp>
+      <p:sp>
+        <p:nvSpPr>
+          <p:cNvPr id="6" name="Rounded Rectangle 5"/>
+          <p:cNvSpPr/>
+          <p:nvPr/>
+        </p:nvSpPr>
+        <p:spPr>
+          <a:xfrm>
+            <a:off x="1097280" y="2743200"/>
+            <a:ext cx="10515600" cy="1280160"/>
+          </a:xfrm>
+          <a:prstGeom prst="roundRect">
+            <a:avLst/>
+          </a:prstGeom>
+          <a:solidFill>
+            <a:srgbClr val="2D453E"/>
+          </a:solidFill>
+          <a:ln w="9525">
+            <a:solidFill>
+              <a:srgbClr val="C5B358"/>
+            </a:solidFill>
+          </a:ln>
+        </p:spPr>
+        <p:style>
+          <a:lnRef idx="1">
+            <a:schemeClr val="accent1"/>
+          </a:lnRef>
+          <a:fillRef idx="3">
+            <a:schemeClr val="accent1"/>
+          </a:fillRef>
+          <a:effectRef idx="2">
+            <a:schemeClr val="accent1"/>
+          </a:effectRef>
+          <a:fontRef idx="minor">
+            <a:schemeClr val="lt1"/>
+          </a:fontRef>
+        </p:style>
+        <p:txBody>
+          <a:bodyPr rtlCol="0" anchor="ctr"/>
+          <a:lstStyle/>
+          <a:p>
+            <a:pPr algn="ctr"/>
+          </a:p>
+        </p:txBody>
+      </p:sp>
+      <p:sp>
+        <p:nvSpPr>
+          <p:cNvPr id="7" name="TextBox 6"/>
+          <p:cNvSpPr txBox="1"/>
+          <p:nvPr/>
+        </p:nvSpPr>
+        <p:spPr>
+          <a:xfrm>
+            <a:off x="1371600" y="2880360"/>
+            <a:ext cx="10058400" cy="274320"/>
+          </a:xfrm>
+          <a:prstGeom prst="rect">
+            <a:avLst/>
+          </a:prstGeom>
+          <a:noFill/>
+        </p:spPr>
+        <p:txBody>
+          <a:bodyPr wrap="square" lIns="0" rIns="0" tIns="0" bIns="0">
+            <a:spAutoFit/>
+          </a:bodyPr>
+          <a:lstStyle/>
+          <a:p>
+            <a:pPr algn="l">
+              <a:defRPr sz="1100" b="1">
+                <a:solidFill>
+                  <a:srgbClr val="D4C878"/>
+                </a:solidFill>
+                <a:latin typeface="Plus Jakarta Sans"/>
+              </a:defRPr>
+            </a:pPr>
+            <a:r>
+              <a:t>AGORA  •  abra o Claude Code e cole:</a:t>
+            </a:r>
+          </a:p>
+        </p:txBody>
+      </p:sp>
+      <p:sp>
+        <p:nvSpPr>
+          <p:cNvPr id="8" name="Rounded Rectangle 7"/>
+          <p:cNvSpPr/>
+          <p:nvPr/>
+        </p:nvSpPr>
+        <p:spPr>
+          <a:xfrm>
+            <a:off x="1371600" y="3200400"/>
+            <a:ext cx="9966960" cy="777240"/>
+          </a:xfrm>
+          <a:prstGeom prst="roundRect">
+            <a:avLst/>
+          </a:prstGeom>
+          <a:solidFill>
+            <a:srgbClr val="0B2823"/>
+          </a:solidFill>
+          <a:ln w="6350">
+            <a:solidFill>
+              <a:srgbClr val="C5B358"/>
+            </a:solidFill>
+          </a:ln>
+        </p:spPr>
+        <p:style>
+          <a:lnRef idx="1">
+            <a:schemeClr val="accent1"/>
+          </a:lnRef>
+          <a:fillRef idx="3">
+            <a:schemeClr val="accent1"/>
+          </a:fillRef>
+          <a:effectRef idx="2">
+            <a:schemeClr val="accent1"/>
+          </a:effectRef>
+          <a:fontRef idx="minor">
+            <a:schemeClr val="lt1"/>
+          </a:fontRef>
+        </p:style>
+        <p:txBody>
+          <a:bodyPr rtlCol="0" anchor="ctr"/>
+          <a:lstStyle/>
+          <a:p>
+            <a:pPr algn="ctr"/>
+          </a:p>
+        </p:txBody>
+      </p:sp>
+      <p:sp>
+        <p:nvSpPr>
+          <p:cNvPr id="9" name="TextBox 8"/>
+          <p:cNvSpPr txBox="1"/>
+          <p:nvPr/>
+        </p:nvSpPr>
+        <p:spPr>
+          <a:xfrm>
+            <a:off x="1554480" y="3337560"/>
+            <a:ext cx="9601200" cy="502920"/>
+          </a:xfrm>
+          <a:prstGeom prst="rect">
+            <a:avLst/>
+          </a:prstGeom>
+          <a:noFill/>
+        </p:spPr>
+        <p:txBody>
+          <a:bodyPr wrap="square" lIns="0" rIns="0" tIns="0" bIns="0">
+            <a:spAutoFit/>
+          </a:bodyPr>
+          <a:lstStyle/>
+          <a:p>
+            <a:pPr algn="l">
+              <a:lnSpc>
+                <a:spcPts val="1400"/>
+              </a:lnSpc>
+              <a:defRPr sz="1400" b="0">
+                <a:solidFill>
+                  <a:srgbClr val="D4C878"/>
+                </a:solidFill>
+                <a:latin typeface="IBM Plex Mono"/>
+              </a:defRPr>
+            </a:pPr>
+            <a:r>
+              <a:t>Acione o voice-humanizer para aplicar o questionario inicial.</a:t>
+            </a:r>
+            <a:br/>
+            <a:r>
+              <a:t>Tenho 3 textos antigos meus para analise estilistica.</a:t>
+            </a:r>
+          </a:p>
+        </p:txBody>
+      </p:sp>
+      <p:sp>
+        <p:nvSpPr>
+          <p:cNvPr id="10" name="TextBox 9"/>
+          <p:cNvSpPr txBox="1"/>
+          <p:nvPr/>
+        </p:nvSpPr>
+        <p:spPr>
+          <a:xfrm>
+            <a:off x="1097280" y="4297680"/>
+            <a:ext cx="10058400" cy="320040"/>
+          </a:xfrm>
+          <a:prstGeom prst="rect">
+            <a:avLst/>
+          </a:prstGeom>
+          <a:noFill/>
+        </p:spPr>
+        <p:txBody>
+          <a:bodyPr wrap="square" lIns="0" rIns="0" tIns="0" bIns="0">
+            <a:spAutoFit/>
+          </a:bodyPr>
+          <a:lstStyle/>
+          <a:p>
+            <a:pPr algn="l">
+              <a:defRPr sz="1100" b="1">
+                <a:solidFill>
+                  <a:srgbClr val="D4C878"/>
+                </a:solidFill>
+                <a:latin typeface="Plus Jakarta Sans"/>
+              </a:defRPr>
+            </a:pPr>
+            <a:r>
+              <a:t>DEPOIS DESSA PRIMEIRA ACAO  •  siga o roteiro</a:t>
+            </a:r>
+          </a:p>
+        </p:txBody>
+      </p:sp>
+      <p:sp>
+        <p:nvSpPr>
+          <p:cNvPr id="11" name="TextBox 10"/>
+          <p:cNvSpPr txBox="1"/>
+          <p:nvPr/>
+        </p:nvSpPr>
+        <p:spPr>
+          <a:xfrm>
+            <a:off x="1280160" y="4663440"/>
+            <a:ext cx="1188720" cy="274320"/>
+          </a:xfrm>
+          <a:prstGeom prst="rect">
+            <a:avLst/>
+          </a:prstGeom>
+          <a:noFill/>
+        </p:spPr>
+        <p:txBody>
+          <a:bodyPr wrap="square" lIns="0" rIns="0" tIns="0" bIns="0">
+            <a:spAutoFit/>
+          </a:bodyPr>
+          <a:lstStyle/>
+          <a:p>
+            <a:pPr algn="l">
+              <a:defRPr sz="1100" b="1">
+                <a:solidFill>
+                  <a:srgbClr val="C5B358"/>
+                </a:solidFill>
+                <a:latin typeface="IBM Plex Mono"/>
+              </a:defRPr>
+            </a:pPr>
+            <a:r>
+              <a:t>Slide 18</a:t>
+            </a:r>
+          </a:p>
+        </p:txBody>
+      </p:sp>
+      <p:sp>
+        <p:nvSpPr>
+          <p:cNvPr id="12" name="TextBox 11"/>
+          <p:cNvSpPr txBox="1"/>
+          <p:nvPr/>
+        </p:nvSpPr>
+        <p:spPr>
+          <a:xfrm>
+            <a:off x="2468880" y="4663440"/>
+            <a:ext cx="9144000" cy="274320"/>
+          </a:xfrm>
+          <a:prstGeom prst="rect">
+            <a:avLst/>
+          </a:prstGeom>
+          <a:noFill/>
+        </p:spPr>
+        <p:txBody>
+          <a:bodyPr wrap="square" lIns="0" rIns="0" tIns="0" bIns="0">
+            <a:spAutoFit/>
+          </a:bodyPr>
+          <a:lstStyle/>
+          <a:p>
+            <a:pPr algn="l">
+              <a:defRPr sz="1200" b="0">
+                <a:solidFill>
+                  <a:srgbClr val="CCCCCC"/>
+                </a:solidFill>
+                <a:latin typeface="Plus Jakarta Sans"/>
+              </a:defRPr>
+            </a:pPr>
+            <a:r>
+              <a:t>Roteiro completo de 6 passos (5 min ate 1 semana)</a:t>
+            </a:r>
+          </a:p>
+        </p:txBody>
+      </p:sp>
+      <p:sp>
+        <p:nvSpPr>
+          <p:cNvPr id="13" name="TextBox 12"/>
+          <p:cNvSpPr txBox="1"/>
+          <p:nvPr/>
+        </p:nvSpPr>
+        <p:spPr>
+          <a:xfrm>
+            <a:off x="1280160" y="5029200"/>
+            <a:ext cx="1188720" cy="274320"/>
+          </a:xfrm>
+          <a:prstGeom prst="rect">
+            <a:avLst/>
+          </a:prstGeom>
+          <a:noFill/>
+        </p:spPr>
+        <p:txBody>
+          <a:bodyPr wrap="square" lIns="0" rIns="0" tIns="0" bIns="0">
+            <a:spAutoFit/>
+          </a:bodyPr>
+          <a:lstStyle/>
+          <a:p>
+            <a:pPr algn="l">
+              <a:defRPr sz="1100" b="1">
+                <a:solidFill>
+                  <a:srgbClr val="C5B358"/>
+                </a:solidFill>
+                <a:latin typeface="IBM Plex Mono"/>
+              </a:defRPr>
+            </a:pPr>
+            <a:r>
+              <a:t>Slide 19</a:t>
+            </a:r>
+          </a:p>
+        </p:txBody>
+      </p:sp>
+      <p:sp>
+        <p:nvSpPr>
+          <p:cNvPr id="14" name="TextBox 13"/>
+          <p:cNvSpPr txBox="1"/>
+          <p:nvPr/>
+        </p:nvSpPr>
+        <p:spPr>
+          <a:xfrm>
+            <a:off x="2468880" y="5029200"/>
+            <a:ext cx="9144000" cy="274320"/>
+          </a:xfrm>
+          <a:prstGeom prst="rect">
+            <a:avLst/>
+          </a:prstGeom>
+          <a:noFill/>
+        </p:spPr>
+        <p:txBody>
+          <a:bodyPr wrap="square" lIns="0" rIns="0" tIns="0" bIns="0">
+            <a:spAutoFit/>
+          </a:bodyPr>
+          <a:lstStyle/>
+          <a:p>
+            <a:pPr algn="l">
+              <a:defRPr sz="1200" b="0">
+                <a:solidFill>
+                  <a:srgbClr val="CCCCCC"/>
+                </a:solidFill>
+                <a:latin typeface="Plus Jakarta Sans"/>
+              </a:defRPr>
+            </a:pPr>
+            <a:r>
+              <a:t>Marcos D1 → D30 + 6 anti-padroes a evitar</a:t>
+            </a:r>
+          </a:p>
+        </p:txBody>
+      </p:sp>
+      <p:sp>
+        <p:nvSpPr>
+          <p:cNvPr id="15" name="TextBox 14"/>
+          <p:cNvSpPr txBox="1"/>
+          <p:nvPr/>
+        </p:nvSpPr>
+        <p:spPr>
+          <a:xfrm>
+            <a:off x="1280160" y="5394959"/>
+            <a:ext cx="1188720" cy="274320"/>
+          </a:xfrm>
+          <a:prstGeom prst="rect">
+            <a:avLst/>
+          </a:prstGeom>
+          <a:noFill/>
+        </p:spPr>
+        <p:txBody>
+          <a:bodyPr wrap="square" lIns="0" rIns="0" tIns="0" bIns="0">
+            <a:spAutoFit/>
+          </a:bodyPr>
+          <a:lstStyle/>
+          <a:p>
+            <a:pPr algn="l">
+              <a:defRPr sz="1100" b="1">
+                <a:solidFill>
+                  <a:srgbClr val="C5B358"/>
+                </a:solidFill>
+                <a:latin typeface="IBM Plex Mono"/>
+              </a:defRPr>
+            </a:pPr>
+            <a:r>
+              <a:t>Slide 17</a:t>
+            </a:r>
+          </a:p>
+        </p:txBody>
+      </p:sp>
+      <p:sp>
+        <p:nvSpPr>
+          <p:cNvPr id="16" name="TextBox 15"/>
+          <p:cNvSpPr txBox="1"/>
+          <p:nvPr/>
+        </p:nvSpPr>
+        <p:spPr>
+          <a:xfrm>
+            <a:off x="2468880" y="5394959"/>
+            <a:ext cx="9144000" cy="274320"/>
+          </a:xfrm>
+          <a:prstGeom prst="rect">
+            <a:avLst/>
+          </a:prstGeom>
+          <a:noFill/>
+        </p:spPr>
+        <p:txBody>
+          <a:bodyPr wrap="square" lIns="0" rIns="0" tIns="0" bIns="0">
+            <a:spAutoFit/>
+          </a:bodyPr>
+          <a:lstStyle/>
+          <a:p>
+            <a:pPr algn="l">
+              <a:defRPr sz="1200" b="0">
+                <a:solidFill>
+                  <a:srgbClr val="CCCCCC"/>
+                </a:solidFill>
+                <a:latin typeface="Plus Jakarta Sans"/>
+              </a:defRPr>
+            </a:pPr>
+            <a:r>
+              <a:t>Cheat sheet imprimivel com os 9 agentes</a:t>
+            </a:r>
+          </a:p>
+        </p:txBody>
+      </p:sp>
+      <p:sp>
+        <p:nvSpPr>
+          <p:cNvPr id="17" name="TextBox 16"/>
+          <p:cNvSpPr txBox="1"/>
+          <p:nvPr/>
+        </p:nvSpPr>
+        <p:spPr>
+          <a:xfrm>
+            <a:off x="1280160" y="5760720"/>
+            <a:ext cx="1188720" cy="274320"/>
+          </a:xfrm>
+          <a:prstGeom prst="rect">
+            <a:avLst/>
+          </a:prstGeom>
+          <a:noFill/>
+        </p:spPr>
+        <p:txBody>
+          <a:bodyPr wrap="square" lIns="0" rIns="0" tIns="0" bIns="0">
+            <a:spAutoFit/>
+          </a:bodyPr>
+          <a:lstStyle/>
+          <a:p>
+            <a:pPr algn="l">
+              <a:defRPr sz="1100" b="1">
+                <a:solidFill>
+                  <a:srgbClr val="C5B358"/>
+                </a:solidFill>
+                <a:latin typeface="IBM Plex Mono"/>
+              </a:defRPr>
+            </a:pPr>
+            <a:r>
+              <a:t>Slide 16</a:t>
+            </a:r>
+          </a:p>
+        </p:txBody>
+      </p:sp>
+      <p:sp>
+        <p:nvSpPr>
+          <p:cNvPr id="18" name="TextBox 17"/>
+          <p:cNvSpPr txBox="1"/>
+          <p:nvPr/>
+        </p:nvSpPr>
+        <p:spPr>
+          <a:xfrm>
+            <a:off x="2468880" y="5760720"/>
+            <a:ext cx="9144000" cy="274320"/>
+          </a:xfrm>
+          <a:prstGeom prst="rect">
+            <a:avLst/>
+          </a:prstGeom>
+          <a:noFill/>
+        </p:spPr>
+        <p:txBody>
+          <a:bodyPr wrap="square" lIns="0" rIns="0" tIns="0" bIns="0">
+            <a:spAutoFit/>
+          </a:bodyPr>
+          <a:lstStyle/>
+          <a:p>
+            <a:pPr algn="l">
+              <a:defRPr sz="1200" b="0">
+                <a:solidFill>
+                  <a:srgbClr val="CCCCCC"/>
+                </a:solidFill>
+                <a:latin typeface="Plus Jakarta Sans"/>
+              </a:defRPr>
+            </a:pPr>
+            <a:r>
+              <a:t>Decision tree quando voce nao souber qual acionar</a:t>
+            </a:r>
+          </a:p>
+        </p:txBody>
+      </p:sp>
+      <p:sp>
+        <p:nvSpPr>
+          <p:cNvPr id="19" name="TextBox 18"/>
+          <p:cNvSpPr txBox="1"/>
+          <p:nvPr/>
+        </p:nvSpPr>
+        <p:spPr>
+          <a:xfrm>
+            <a:off x="1097280" y="6263640"/>
+            <a:ext cx="10058400" cy="274320"/>
+          </a:xfrm>
+          <a:prstGeom prst="rect">
+            <a:avLst/>
+          </a:prstGeom>
+          <a:noFill/>
+        </p:spPr>
+        <p:txBody>
+          <a:bodyPr wrap="square" lIns="0" rIns="0" tIns="0" bIns="0">
+            <a:spAutoFit/>
+          </a:bodyPr>
+          <a:lstStyle/>
+          <a:p>
+            <a:pPr algn="l">
+              <a:defRPr sz="1000" b="0">
+                <a:solidFill>
+                  <a:srgbClr val="D4C878"/>
+                </a:solidFill>
+                <a:latin typeface="IBM Plex Mono"/>
+              </a:defRPr>
+            </a:pPr>
+            <a:r>
+              <a:t>Manual completo: github.com/byfabioviana/agent-study-assistant</a:t>
+            </a:r>
+          </a:p>
+        </p:txBody>
+      </p:sp>
+      <p:sp>
+        <p:nvSpPr>
+          <p:cNvPr id="20" name="TextBox 19"/>
+          <p:cNvSpPr txBox="1"/>
+          <p:nvPr/>
+        </p:nvSpPr>
+        <p:spPr>
+          <a:xfrm>
+            <a:off x="1097280" y="6537960"/>
+            <a:ext cx="10058400" cy="274320"/>
+          </a:xfrm>
+          <a:prstGeom prst="rect">
+            <a:avLst/>
+          </a:prstGeom>
+          <a:noFill/>
+        </p:spPr>
+        <p:txBody>
+          <a:bodyPr wrap="square" lIns="0" rIns="0" tIns="0" bIns="0">
+            <a:spAutoFit/>
+          </a:bodyPr>
+          <a:lstStyle/>
+          <a:p>
+            <a:pPr algn="r">
+              <a:defRPr sz="900" b="0">
+                <a:solidFill>
+                  <a:srgbClr val="888888"/>
+                </a:solidFill>
+                <a:latin typeface="IBM Plex Mono"/>
+              </a:defRPr>
+            </a:pPr>
+            <a:r>
+              <a:t>Verticalis AI Journey  •  Education  •  Maio 2026  •  v1.1</a:t>
             </a:r>
           </a:p>
         </p:txBody>
@@ -19038,7 +24319,7 @@
               </a:defRPr>
             </a:pPr>
             <a:r>
-              <a:t>03 / 18</a:t>
+              <a:t>03 / 20</a:t>
             </a:r>
           </a:p>
         </p:txBody>
@@ -20542,7 +25823,7 @@
               </a:defRPr>
             </a:pPr>
             <a:r>
-              <a:t>04 / 18</a:t>
+              <a:t>04 / 20</a:t>
             </a:r>
           </a:p>
         </p:txBody>
@@ -21853,7 +27134,7 @@
               </a:defRPr>
             </a:pPr>
             <a:r>
-              <a:t>05 / 18</a:t>
+              <a:t>05 / 20</a:t>
             </a:r>
           </a:p>
         </p:txBody>
@@ -24274,7 +29555,7 @@
               </a:defRPr>
             </a:pPr>
             <a:r>
-              <a:t>06 / 18</a:t>
+              <a:t>06 / 20</a:t>
             </a:r>
           </a:p>
         </p:txBody>
@@ -25292,7 +30573,7 @@
               </a:defRPr>
             </a:pPr>
             <a:r>
-              <a:t>07 / 18</a:t>
+              <a:t>07 / 20</a:t>
             </a:r>
           </a:p>
         </p:txBody>
@@ -26345,7 +31626,7 @@
               </a:defRPr>
             </a:pPr>
             <a:r>
-              <a:t>08 / 18</a:t>
+              <a:t>08 / 20</a:t>
             </a:r>
           </a:p>
         </p:txBody>
@@ -27364,7 +32645,7 @@
               </a:defRPr>
             </a:pPr>
             <a:r>
-              <a:t>09 / 18</a:t>
+              <a:t>09 / 20</a:t>
             </a:r>
           </a:p>
         </p:txBody>
